--- a/examples/templates/branddocs_template.pptx
+++ b/examples/templates/branddocs_template.pptx
@@ -8,14 +8,14 @@
     <p:sldId id="256" r:id="rId7"/>
     <p:sldId id="257" r:id="rId8"/>
     <p:sldId id="258" r:id="rId9"/>
-    <p:sldId id="259" r:id="rId10"/>
-    <p:sldId id="260" r:id="rId11"/>
-    <p:sldId id="261" r:id="rId12"/>
-    <p:sldId id="262" r:id="rId13"/>
-    <p:sldId id="263" r:id="rId14"/>
-    <p:sldId id="264" r:id="rId15"/>
-    <p:sldId id="265" r:id="rId16"/>
-    <p:sldId id="266" r:id="rId17"/>
+    <p:sldId id="259" r:id="rId11"/>
+    <p:sldId id="260" r:id="rId12"/>
+    <p:sldId id="261" r:id="rId13"/>
+    <p:sldId id="262" r:id="rId14"/>
+    <p:sldId id="263" r:id="rId15"/>
+    <p:sldId id="264" r:id="rId16"/>
+    <p:sldId id="265" r:id="rId17"/>
+    <p:sldId id="266" r:id="rId18"/>
   </p:sldIdLst>
   <p:sldSz cx="9144000" cy="6858000" type="screen4x3"/>
   <p:notesSz cx="6858000" cy="9144000"/>
@@ -683,6 +683,426 @@
     <c:autoUpdate val="0"/>
   </c:externalData>
 </c:chartSpace>
+</file>
+
+<file path=ppt/notesMasters/notesMaster1.xml><?xml version="1.0" encoding="utf-8"?>
+<p:notesMaster xmlns:a="http://schemas.openxmlformats.org/drawingml/2006/main" xmlns:p="http://schemas.openxmlformats.org/presentationml/2006/main" xmlns:r="http://schemas.openxmlformats.org/officeDocument/2006/relationships">
+  <p:cSld>
+    <p:bg>
+      <p:bgRef idx="1001">
+        <a:schemeClr val="bg1"/>
+      </p:bgRef>
+    </p:bg>
+    <p:spTree>
+      <p:nvGrpSpPr>
+        <p:cNvPr id="1" name=""/>
+        <p:cNvGrpSpPr/>
+        <p:nvPr/>
+      </p:nvGrpSpPr>
+      <p:grpSpPr>
+        <a:xfrm>
+          <a:off x="0" y="0"/>
+          <a:ext cx="0" cy="0"/>
+          <a:chOff x="0" y="0"/>
+          <a:chExt cx="0" cy="0"/>
+        </a:xfrm>
+      </p:grpSpPr>
+      <p:sp>
+        <p:nvSpPr>
+          <p:cNvPr id="2" name="Header Placeholder 1"/>
+          <p:cNvSpPr>
+            <a:spLocks noGrp="1"/>
+          </p:cNvSpPr>
+          <p:nvPr>
+            <p:ph type="hdr" sz="quarter"/>
+          </p:nvPr>
+        </p:nvSpPr>
+        <p:spPr>
+          <a:xfrm>
+            <a:off x="0" y="0"/>
+            <a:ext cx="2971800" cy="457200"/>
+          </a:xfrm>
+          <a:prstGeom prst="rect">
+            <a:avLst/>
+          </a:prstGeom>
+        </p:spPr>
+        <p:txBody>
+          <a:bodyPr vert="horz" lIns="91440" tIns="45720" rIns="91440" bIns="45720" rtlCol="0"/>
+          <a:lstStyle>
+            <a:lvl1pPr algn="l">
+              <a:defRPr sz="1200"/>
+            </a:lvl1pPr>
+          </a:lstStyle>
+          <a:p>
+            <a:endParaRPr lang="en-US"/>
+          </a:p>
+        </p:txBody>
+      </p:sp>
+      <p:sp>
+        <p:nvSpPr>
+          <p:cNvPr id="3" name="Date Placeholder 2"/>
+          <p:cNvSpPr>
+            <a:spLocks noGrp="1"/>
+          </p:cNvSpPr>
+          <p:nvPr>
+            <p:ph type="dt" idx="1"/>
+          </p:nvPr>
+        </p:nvSpPr>
+        <p:spPr>
+          <a:xfrm>
+            <a:off x="3884613" y="0"/>
+            <a:ext cx="2971800" cy="457200"/>
+          </a:xfrm>
+          <a:prstGeom prst="rect">
+            <a:avLst/>
+          </a:prstGeom>
+        </p:spPr>
+        <p:txBody>
+          <a:bodyPr vert="horz" lIns="91440" tIns="45720" rIns="91440" bIns="45720" rtlCol="0"/>
+          <a:lstStyle>
+            <a:lvl1pPr algn="r">
+              <a:defRPr sz="1200"/>
+            </a:lvl1pPr>
+          </a:lstStyle>
+          <a:p>
+            <a:fld id="{0F89C1C7-3DCD-1040-A9CF-14679D8B5DDD}" type="datetimeFigureOut">
+              <a:rPr lang="en-US" smtClean="0"/>
+              <a:t>10/17/16</a:t>
+            </a:fld>
+            <a:endParaRPr lang="en-US"/>
+          </a:p>
+        </p:txBody>
+      </p:sp>
+      <p:sp>
+        <p:nvSpPr>
+          <p:cNvPr id="4" name="Slide Image Placeholder 3"/>
+          <p:cNvSpPr>
+            <a:spLocks noGrp="1" noRot="1" noChangeAspect="1"/>
+          </p:cNvSpPr>
+          <p:nvPr>
+            <p:ph type="sldImg" idx="2"/>
+          </p:nvPr>
+        </p:nvSpPr>
+        <p:spPr>
+          <a:xfrm>
+            <a:off x="1143000" y="685800"/>
+            <a:ext cx="4572000" cy="3429000"/>
+          </a:xfrm>
+          <a:prstGeom prst="rect">
+            <a:avLst/>
+          </a:prstGeom>
+          <a:noFill/>
+          <a:ln w="12700">
+            <a:solidFill>
+              <a:prstClr val="black"/>
+            </a:solidFill>
+          </a:ln>
+        </p:spPr>
+        <p:txBody>
+          <a:bodyPr vert="horz" lIns="91440" tIns="45720" rIns="91440" bIns="45720" rtlCol="0" anchor="ctr"/>
+          <a:lstStyle/>
+          <a:p>
+            <a:endParaRPr lang="en-US"/>
+          </a:p>
+        </p:txBody>
+      </p:sp>
+      <p:sp>
+        <p:nvSpPr>
+          <p:cNvPr id="5" name="Notes Placeholder 4"/>
+          <p:cNvSpPr>
+            <a:spLocks noGrp="1"/>
+          </p:cNvSpPr>
+          <p:nvPr>
+            <p:ph type="body" sz="quarter" idx="3"/>
+          </p:nvPr>
+        </p:nvSpPr>
+        <p:spPr>
+          <a:xfrm>
+            <a:off x="685800" y="4343400"/>
+            <a:ext cx="5486400" cy="4114800"/>
+          </a:xfrm>
+          <a:prstGeom prst="rect">
+            <a:avLst/>
+          </a:prstGeom>
+        </p:spPr>
+        <p:txBody>
+          <a:bodyPr vert="horz" lIns="91440" tIns="45720" rIns="91440" bIns="45720" rtlCol="0"/>
+          <a:lstStyle/>
+          <a:p>
+            <a:pPr lvl="0"/>
+            <a:r>
+              <a:rPr lang="en-US" smtClean="0"/>
+              <a:t>Click to edit Master text styles</a:t>
+            </a:r>
+          </a:p>
+          <a:p>
+            <a:pPr lvl="1"/>
+            <a:r>
+              <a:rPr lang="en-US" smtClean="0"/>
+              <a:t>Second level</a:t>
+            </a:r>
+          </a:p>
+          <a:p>
+            <a:pPr lvl="2"/>
+            <a:r>
+              <a:rPr lang="en-US" smtClean="0"/>
+              <a:t>Third level</a:t>
+            </a:r>
+          </a:p>
+          <a:p>
+            <a:pPr lvl="3"/>
+            <a:r>
+              <a:rPr lang="en-US" smtClean="0"/>
+              <a:t>Fourth level</a:t>
+            </a:r>
+          </a:p>
+          <a:p>
+            <a:pPr lvl="4"/>
+            <a:r>
+              <a:rPr lang="en-US" smtClean="0"/>
+              <a:t>Fifth level</a:t>
+            </a:r>
+            <a:endParaRPr lang="en-US"/>
+          </a:p>
+        </p:txBody>
+      </p:sp>
+      <p:sp>
+        <p:nvSpPr>
+          <p:cNvPr id="6" name="Footer Placeholder 5"/>
+          <p:cNvSpPr>
+            <a:spLocks noGrp="1"/>
+          </p:cNvSpPr>
+          <p:nvPr>
+            <p:ph type="ftr" sz="quarter" idx="4"/>
+          </p:nvPr>
+        </p:nvSpPr>
+        <p:spPr>
+          <a:xfrm>
+            <a:off x="0" y="8685213"/>
+            <a:ext cx="2971800" cy="457200"/>
+          </a:xfrm>
+          <a:prstGeom prst="rect">
+            <a:avLst/>
+          </a:prstGeom>
+        </p:spPr>
+        <p:txBody>
+          <a:bodyPr vert="horz" lIns="91440" tIns="45720" rIns="91440" bIns="45720" rtlCol="0" anchor="b"/>
+          <a:lstStyle>
+            <a:lvl1pPr algn="l">
+              <a:defRPr sz="1200"/>
+            </a:lvl1pPr>
+          </a:lstStyle>
+          <a:p>
+            <a:endParaRPr lang="en-US"/>
+          </a:p>
+        </p:txBody>
+      </p:sp>
+      <p:sp>
+        <p:nvSpPr>
+          <p:cNvPr id="7" name="Slide Number Placeholder 6"/>
+          <p:cNvSpPr>
+            <a:spLocks noGrp="1"/>
+          </p:cNvSpPr>
+          <p:nvPr>
+            <p:ph type="sldNum" sz="quarter" idx="5"/>
+          </p:nvPr>
+        </p:nvSpPr>
+        <p:spPr>
+          <a:xfrm>
+            <a:off x="3884613" y="8685213"/>
+            <a:ext cx="2971800" cy="457200"/>
+          </a:xfrm>
+          <a:prstGeom prst="rect">
+            <a:avLst/>
+          </a:prstGeom>
+        </p:spPr>
+        <p:txBody>
+          <a:bodyPr vert="horz" lIns="91440" tIns="45720" rIns="91440" bIns="45720" rtlCol="0" anchor="b"/>
+          <a:lstStyle>
+            <a:lvl1pPr algn="r">
+              <a:defRPr sz="1200"/>
+            </a:lvl1pPr>
+          </a:lstStyle>
+          <a:p>
+            <a:fld id="{BB5E49A5-4136-284D-997B-48E1D791AD67}" type="slidenum">
+              <a:rPr lang="en-US" smtClean="0"/>
+              <a:t>‹#›</a:t>
+            </a:fld>
+            <a:endParaRPr lang="en-US"/>
+          </a:p>
+        </p:txBody>
+      </p:sp>
+    </p:spTree>
+    <p:extLst>
+      <p:ext uri="{BB962C8B-B14F-4D97-AF65-F5344CB8AC3E}">
+        <p14:creationId xmlns:p14="http://schemas.microsoft.com/office/powerpoint/2010/main" val="2623252185"/>
+      </p:ext>
+    </p:extLst>
+  </p:cSld>
+  <p:clrMap bg1="lt1" tx1="dk1" bg2="lt2" tx2="dk2" accent1="accent1" accent2="accent2" accent3="accent3" accent4="accent4" accent5="accent5" accent6="accent6" hlink="hlink" folHlink="folHlink"/>
+  <p:notesStyle>
+    <a:lvl1pPr marL="0" algn="l" defTabSz="457200" rtl="0" eaLnBrk="1" latinLnBrk="0" hangingPunct="1">
+      <a:defRPr sz="1200" kern="1200">
+        <a:solidFill>
+          <a:schemeClr val="tx1"/>
+        </a:solidFill>
+        <a:latin typeface="+mn-lt"/>
+        <a:ea typeface="+mn-ea"/>
+        <a:cs typeface="+mn-cs"/>
+      </a:defRPr>
+    </a:lvl1pPr>
+    <a:lvl2pPr marL="457200" algn="l" defTabSz="457200" rtl="0" eaLnBrk="1" latinLnBrk="0" hangingPunct="1">
+      <a:defRPr sz="1200" kern="1200">
+        <a:solidFill>
+          <a:schemeClr val="tx1"/>
+        </a:solidFill>
+        <a:latin typeface="+mn-lt"/>
+        <a:ea typeface="+mn-ea"/>
+        <a:cs typeface="+mn-cs"/>
+      </a:defRPr>
+    </a:lvl2pPr>
+    <a:lvl3pPr marL="914400" algn="l" defTabSz="457200" rtl="0" eaLnBrk="1" latinLnBrk="0" hangingPunct="1">
+      <a:defRPr sz="1200" kern="1200">
+        <a:solidFill>
+          <a:schemeClr val="tx1"/>
+        </a:solidFill>
+        <a:latin typeface="+mn-lt"/>
+        <a:ea typeface="+mn-ea"/>
+        <a:cs typeface="+mn-cs"/>
+      </a:defRPr>
+    </a:lvl3pPr>
+    <a:lvl4pPr marL="1371600" algn="l" defTabSz="457200" rtl="0" eaLnBrk="1" latinLnBrk="0" hangingPunct="1">
+      <a:defRPr sz="1200" kern="1200">
+        <a:solidFill>
+          <a:schemeClr val="tx1"/>
+        </a:solidFill>
+        <a:latin typeface="+mn-lt"/>
+        <a:ea typeface="+mn-ea"/>
+        <a:cs typeface="+mn-cs"/>
+      </a:defRPr>
+    </a:lvl4pPr>
+    <a:lvl5pPr marL="1828800" algn="l" defTabSz="457200" rtl="0" eaLnBrk="1" latinLnBrk="0" hangingPunct="1">
+      <a:defRPr sz="1200" kern="1200">
+        <a:solidFill>
+          <a:schemeClr val="tx1"/>
+        </a:solidFill>
+        <a:latin typeface="+mn-lt"/>
+        <a:ea typeface="+mn-ea"/>
+        <a:cs typeface="+mn-cs"/>
+      </a:defRPr>
+    </a:lvl5pPr>
+    <a:lvl6pPr marL="2286000" algn="l" defTabSz="457200" rtl="0" eaLnBrk="1" latinLnBrk="0" hangingPunct="1">
+      <a:defRPr sz="1200" kern="1200">
+        <a:solidFill>
+          <a:schemeClr val="tx1"/>
+        </a:solidFill>
+        <a:latin typeface="+mn-lt"/>
+        <a:ea typeface="+mn-ea"/>
+        <a:cs typeface="+mn-cs"/>
+      </a:defRPr>
+    </a:lvl6pPr>
+    <a:lvl7pPr marL="2743200" algn="l" defTabSz="457200" rtl="0" eaLnBrk="1" latinLnBrk="0" hangingPunct="1">
+      <a:defRPr sz="1200" kern="1200">
+        <a:solidFill>
+          <a:schemeClr val="tx1"/>
+        </a:solidFill>
+        <a:latin typeface="+mn-lt"/>
+        <a:ea typeface="+mn-ea"/>
+        <a:cs typeface="+mn-cs"/>
+      </a:defRPr>
+    </a:lvl7pPr>
+    <a:lvl8pPr marL="3200400" algn="l" defTabSz="457200" rtl="0" eaLnBrk="1" latinLnBrk="0" hangingPunct="1">
+      <a:defRPr sz="1200" kern="1200">
+        <a:solidFill>
+          <a:schemeClr val="tx1"/>
+        </a:solidFill>
+        <a:latin typeface="+mn-lt"/>
+        <a:ea typeface="+mn-ea"/>
+        <a:cs typeface="+mn-cs"/>
+      </a:defRPr>
+    </a:lvl8pPr>
+    <a:lvl9pPr marL="3657600" algn="l" defTabSz="457200" rtl="0" eaLnBrk="1" latinLnBrk="0" hangingPunct="1">
+      <a:defRPr sz="1200" kern="1200">
+        <a:solidFill>
+          <a:schemeClr val="tx1"/>
+        </a:solidFill>
+        <a:latin typeface="+mn-lt"/>
+        <a:ea typeface="+mn-ea"/>
+        <a:cs typeface="+mn-cs"/>
+      </a:defRPr>
+    </a:lvl9pPr>
+  </p:notesStyle>
+</p:notesMaster>
+</file>
+
+<file path=ppt/notesSlides/notesSlide1.xml><?xml version="1.0" encoding="utf-8"?>
+<p:notes xmlns:a="http://schemas.openxmlformats.org/drawingml/2006/main" xmlns:p="http://schemas.openxmlformats.org/presentationml/2006/main" xmlns:r="http://schemas.openxmlformats.org/officeDocument/2006/relationships">
+  <p:cSld>
+    <p:spTree>
+      <p:nvGrpSpPr>
+        <p:cNvPr id="1" name=""/>
+        <p:cNvGrpSpPr/>
+        <p:nvPr/>
+      </p:nvGrpSpPr>
+      <p:grpSpPr>
+        <a:xfrm>
+          <a:off x="0" y="0"/>
+          <a:ext cx="0" cy="0"/>
+          <a:chOff x="0" y="0"/>
+          <a:chExt cx="0" cy="0"/>
+        </a:xfrm>
+      </p:grpSpPr>
+      <p:sp>
+        <p:nvSpPr>
+          <p:cNvPr id="2" name="Slide Image Placeholder 1"/>
+          <p:cNvSpPr>
+            <a:spLocks noGrp="1"/>
+          </p:cNvSpPr>
+          <p:nvPr>
+            <p:ph type="sldImg" idx="2"/>
+          </p:nvPr>
+        </p:nvSpPr>
+        <p:spPr/>
+      </p:sp>
+      <p:sp>
+        <p:nvSpPr>
+          <p:cNvPr id="3" name="Notes Placeholder 2"/>
+          <p:cNvSpPr>
+            <a:spLocks noGrp="1"/>
+          </p:cNvSpPr>
+          <p:nvPr>
+            <p:ph type="body" idx="3" sz="quarter"/>
+          </p:nvPr>
+        </p:nvSpPr>
+        <p:spPr/>
+        <p:txBody>
+          <a:bodyPr/>
+          <a:lstStyle/>
+          <a:p>
+            <a:r>
+              <a:t>Speaker notes: lead with the 18% YoY headline, then the 230 bps margin expansion. Pause on the input-cost risk before the regional breakdown.</a:t>
+            </a:r>
+          </a:p>
+        </p:txBody>
+      </p:sp>
+      <p:sp>
+        <p:nvSpPr>
+          <p:cNvPr id="4" name="Slide Number Placeholder 3"/>
+          <p:cNvSpPr>
+            <a:spLocks noGrp="1"/>
+          </p:cNvSpPr>
+          <p:nvPr>
+            <p:ph type="sldNum" idx="5" sz="quarter"/>
+          </p:nvPr>
+        </p:nvSpPr>
+        <p:spPr/>
+      </p:sp>
+    </p:spTree>
+  </p:cSld>
+  <p:clrMapOvr>
+    <a:masterClrMapping/>
+  </p:clrMapOvr>
+</p:notes>
 </file>
 
 <file path=ppt/slideLayouts/slideLayout1.xml><?xml version="1.0" encoding="utf-8"?>
@@ -7094,4 +7514,324 @@
   </a:objectDefaults>
   <a:extraClrSchemeLst/>
 </a:theme>
+</file>
+
+<file path=ppt/theme/theme2.xml><?xml version="1.0" encoding="utf-8"?>
+<a:theme xmlns:a="http://schemas.openxmlformats.org/drawingml/2006/main" name="Office Theme">
+  <a:themeElements>
+    <a:clrScheme name="Office">
+      <a:dk1>
+        <a:sysClr val="windowText" lastClr="000000"/>
+      </a:dk1>
+      <a:lt1>
+        <a:sysClr val="window" lastClr="FFFFFF"/>
+      </a:lt1>
+      <a:dk2>
+        <a:srgbClr val="1F497D"/>
+      </a:dk2>
+      <a:lt2>
+        <a:srgbClr val="EEECE1"/>
+      </a:lt2>
+      <a:accent1>
+        <a:srgbClr val="4F81BD"/>
+      </a:accent1>
+      <a:accent2>
+        <a:srgbClr val="C0504D"/>
+      </a:accent2>
+      <a:accent3>
+        <a:srgbClr val="9BBB59"/>
+      </a:accent3>
+      <a:accent4>
+        <a:srgbClr val="8064A2"/>
+      </a:accent4>
+      <a:accent5>
+        <a:srgbClr val="4BACC6"/>
+      </a:accent5>
+      <a:accent6>
+        <a:srgbClr val="F79646"/>
+      </a:accent6>
+      <a:hlink>
+        <a:srgbClr val="0000FF"/>
+      </a:hlink>
+      <a:folHlink>
+        <a:srgbClr val="800080"/>
+      </a:folHlink>
+    </a:clrScheme>
+    <a:fontScheme name="Office">
+      <a:majorFont>
+        <a:latin typeface="Calibri"/>
+        <a:ea typeface=""/>
+        <a:cs typeface=""/>
+        <a:font script="Jpan" typeface="ＭＳ Ｐゴシック"/>
+        <a:font script="Hang" typeface="맑은 고딕"/>
+        <a:font script="Hans" typeface="宋体"/>
+        <a:font script="Hant" typeface="新細明體"/>
+        <a:font script="Arab" typeface="Times New Roman"/>
+        <a:font script="Hebr" typeface="Times New Roman"/>
+        <a:font script="Thai" typeface="Angsana New"/>
+        <a:font script="Ethi" typeface="Nyala"/>
+        <a:font script="Beng" typeface="Vrinda"/>
+        <a:font script="Gujr" typeface="Shruti"/>
+        <a:font script="Khmr" typeface="MoolBoran"/>
+        <a:font script="Knda" typeface="Tunga"/>
+        <a:font script="Guru" typeface="Raavi"/>
+        <a:font script="Cans" typeface="Euphemia"/>
+        <a:font script="Cher" typeface="Plantagenet Cherokee"/>
+        <a:font script="Yiii" typeface="Microsoft Yi Baiti"/>
+        <a:font script="Tibt" typeface="Microsoft Himalaya"/>
+        <a:font script="Thaa" typeface="MV Boli"/>
+        <a:font script="Deva" typeface="Mangal"/>
+        <a:font script="Telu" typeface="Gautami"/>
+        <a:font script="Taml" typeface="Latha"/>
+        <a:font script="Syrc" typeface="Estrangelo Edessa"/>
+        <a:font script="Orya" typeface="Kalinga"/>
+        <a:font script="Mlym" typeface="Kartika"/>
+        <a:font script="Laoo" typeface="DokChampa"/>
+        <a:font script="Sinh" typeface="Iskoola Pota"/>
+        <a:font script="Mong" typeface="Mongolian Baiti"/>
+        <a:font script="Viet" typeface="Times New Roman"/>
+        <a:font script="Uigh" typeface="Microsoft Uighur"/>
+        <a:font script="Geor" typeface="Sylfaen"/>
+      </a:majorFont>
+      <a:minorFont>
+        <a:latin typeface="Calibri"/>
+        <a:ea typeface=""/>
+        <a:cs typeface=""/>
+        <a:font script="Jpan" typeface="ＭＳ Ｐゴシック"/>
+        <a:font script="Hang" typeface="맑은 고딕"/>
+        <a:font script="Hans" typeface="宋体"/>
+        <a:font script="Hant" typeface="新細明體"/>
+        <a:font script="Arab" typeface="Arial"/>
+        <a:font script="Hebr" typeface="Arial"/>
+        <a:font script="Thai" typeface="Cordia New"/>
+        <a:font script="Ethi" typeface="Nyala"/>
+        <a:font script="Beng" typeface="Vrinda"/>
+        <a:font script="Gujr" typeface="Shruti"/>
+        <a:font script="Khmr" typeface="DaunPenh"/>
+        <a:font script="Knda" typeface="Tunga"/>
+        <a:font script="Guru" typeface="Raavi"/>
+        <a:font script="Cans" typeface="Euphemia"/>
+        <a:font script="Cher" typeface="Plantagenet Cherokee"/>
+        <a:font script="Yiii" typeface="Microsoft Yi Baiti"/>
+        <a:font script="Tibt" typeface="Microsoft Himalaya"/>
+        <a:font script="Thaa" typeface="MV Boli"/>
+        <a:font script="Deva" typeface="Mangal"/>
+        <a:font script="Telu" typeface="Gautami"/>
+        <a:font script="Taml" typeface="Latha"/>
+        <a:font script="Syrc" typeface="Estrangelo Edessa"/>
+        <a:font script="Orya" typeface="Kalinga"/>
+        <a:font script="Mlym" typeface="Kartika"/>
+        <a:font script="Laoo" typeface="DokChampa"/>
+        <a:font script="Sinh" typeface="Iskoola Pota"/>
+        <a:font script="Mong" typeface="Mongolian Baiti"/>
+        <a:font script="Viet" typeface="Arial"/>
+        <a:font script="Uigh" typeface="Microsoft Uighur"/>
+        <a:font script="Geor" typeface="Sylfaen"/>
+      </a:minorFont>
+    </a:fontScheme>
+    <a:fmtScheme name="Office">
+      <a:fillStyleLst>
+        <a:solidFill>
+          <a:schemeClr val="phClr"/>
+        </a:solidFill>
+        <a:gradFill rotWithShape="1">
+          <a:gsLst>
+            <a:gs pos="0">
+              <a:schemeClr val="phClr">
+                <a:tint val="50000"/>
+                <a:satMod val="300000"/>
+              </a:schemeClr>
+            </a:gs>
+            <a:gs pos="35000">
+              <a:schemeClr val="phClr">
+                <a:tint val="37000"/>
+                <a:satMod val="300000"/>
+              </a:schemeClr>
+            </a:gs>
+            <a:gs pos="100000">
+              <a:schemeClr val="phClr">
+                <a:tint val="15000"/>
+                <a:satMod val="350000"/>
+              </a:schemeClr>
+            </a:gs>
+          </a:gsLst>
+          <a:lin ang="16200000" scaled="1"/>
+        </a:gradFill>
+        <a:gradFill rotWithShape="1">
+          <a:gsLst>
+            <a:gs pos="0">
+              <a:schemeClr val="phClr">
+                <a:tint val="100000"/>
+                <a:shade val="100000"/>
+                <a:satMod val="130000"/>
+              </a:schemeClr>
+            </a:gs>
+            <a:gs pos="100000">
+              <a:schemeClr val="phClr">
+                <a:tint val="50000"/>
+                <a:shade val="100000"/>
+                <a:satMod val="350000"/>
+              </a:schemeClr>
+            </a:gs>
+          </a:gsLst>
+          <a:lin ang="16200000" scaled="0"/>
+        </a:gradFill>
+      </a:fillStyleLst>
+      <a:lnStyleLst>
+        <a:ln w="9525" cap="flat" cmpd="sng" algn="ctr">
+          <a:solidFill>
+            <a:schemeClr val="phClr">
+              <a:shade val="95000"/>
+              <a:satMod val="105000"/>
+            </a:schemeClr>
+          </a:solidFill>
+          <a:prstDash val="solid"/>
+        </a:ln>
+        <a:ln w="25400" cap="flat" cmpd="sng" algn="ctr">
+          <a:solidFill>
+            <a:schemeClr val="phClr"/>
+          </a:solidFill>
+          <a:prstDash val="solid"/>
+        </a:ln>
+        <a:ln w="38100" cap="flat" cmpd="sng" algn="ctr">
+          <a:solidFill>
+            <a:schemeClr val="phClr"/>
+          </a:solidFill>
+          <a:prstDash val="solid"/>
+        </a:ln>
+      </a:lnStyleLst>
+      <a:effectStyleLst>
+        <a:effectStyle>
+          <a:effectLst>
+            <a:outerShdw blurRad="40000" dist="20000" dir="5400000" rotWithShape="0">
+              <a:srgbClr val="000000">
+                <a:alpha val="38000"/>
+              </a:srgbClr>
+            </a:outerShdw>
+          </a:effectLst>
+        </a:effectStyle>
+        <a:effectStyle>
+          <a:effectLst>
+            <a:outerShdw blurRad="40000" dist="23000" dir="5400000" rotWithShape="0">
+              <a:srgbClr val="000000">
+                <a:alpha val="35000"/>
+              </a:srgbClr>
+            </a:outerShdw>
+          </a:effectLst>
+        </a:effectStyle>
+        <a:effectStyle>
+          <a:effectLst>
+            <a:outerShdw blurRad="40000" dist="23000" dir="5400000" rotWithShape="0">
+              <a:srgbClr val="000000">
+                <a:alpha val="35000"/>
+              </a:srgbClr>
+            </a:outerShdw>
+          </a:effectLst>
+          <a:scene3d>
+            <a:camera prst="orthographicFront">
+              <a:rot lat="0" lon="0" rev="0"/>
+            </a:camera>
+            <a:lightRig rig="threePt" dir="t">
+              <a:rot lat="0" lon="0" rev="1200000"/>
+            </a:lightRig>
+          </a:scene3d>
+          <a:sp3d>
+            <a:bevelT w="63500" h="25400"/>
+          </a:sp3d>
+        </a:effectStyle>
+      </a:effectStyleLst>
+      <a:bgFillStyleLst>
+        <a:solidFill>
+          <a:schemeClr val="phClr"/>
+        </a:solidFill>
+        <a:gradFill rotWithShape="1">
+          <a:gsLst>
+            <a:gs pos="0">
+              <a:schemeClr val="phClr">
+                <a:tint val="40000"/>
+                <a:satMod val="350000"/>
+              </a:schemeClr>
+            </a:gs>
+            <a:gs pos="40000">
+              <a:schemeClr val="phClr">
+                <a:tint val="45000"/>
+                <a:shade val="99000"/>
+                <a:satMod val="350000"/>
+              </a:schemeClr>
+            </a:gs>
+            <a:gs pos="100000">
+              <a:schemeClr val="phClr">
+                <a:shade val="20000"/>
+                <a:satMod val="255000"/>
+              </a:schemeClr>
+            </a:gs>
+          </a:gsLst>
+          <a:path path="circle">
+            <a:fillToRect l="50000" t="-80000" r="50000" b="180000"/>
+          </a:path>
+        </a:gradFill>
+        <a:gradFill rotWithShape="1">
+          <a:gsLst>
+            <a:gs pos="0">
+              <a:schemeClr val="phClr">
+                <a:tint val="80000"/>
+                <a:satMod val="300000"/>
+              </a:schemeClr>
+            </a:gs>
+            <a:gs pos="100000">
+              <a:schemeClr val="phClr">
+                <a:shade val="30000"/>
+                <a:satMod val="200000"/>
+              </a:schemeClr>
+            </a:gs>
+          </a:gsLst>
+          <a:path path="circle">
+            <a:fillToRect l="50000" t="50000" r="50000" b="50000"/>
+          </a:path>
+        </a:gradFill>
+      </a:bgFillStyleLst>
+    </a:fmtScheme>
+  </a:themeElements>
+  <a:objectDefaults>
+    <a:spDef>
+      <a:spPr/>
+      <a:bodyPr/>
+      <a:lstStyle/>
+      <a:style>
+        <a:lnRef idx="1">
+          <a:schemeClr val="accent1"/>
+        </a:lnRef>
+        <a:fillRef idx="3">
+          <a:schemeClr val="accent1"/>
+        </a:fillRef>
+        <a:effectRef idx="2">
+          <a:schemeClr val="accent1"/>
+        </a:effectRef>
+        <a:fontRef idx="minor">
+          <a:schemeClr val="lt1"/>
+        </a:fontRef>
+      </a:style>
+    </a:spDef>
+    <a:lnDef>
+      <a:spPr/>
+      <a:bodyPr/>
+      <a:lstStyle/>
+      <a:style>
+        <a:lnRef idx="2">
+          <a:schemeClr val="accent1"/>
+        </a:lnRef>
+        <a:fillRef idx="0">
+          <a:schemeClr val="accent1"/>
+        </a:fillRef>
+        <a:effectRef idx="1">
+          <a:schemeClr val="accent1"/>
+        </a:effectRef>
+        <a:fontRef idx="minor">
+          <a:schemeClr val="tx1"/>
+        </a:fontRef>
+      </a:style>
+    </a:lnDef>
+  </a:objectDefaults>
+  <a:extraClrSchemeLst/>
+</a:theme>
 </file>
--- a/examples/templates/branddocs_template.pptx
+++ b/examples/templates/branddocs_template.pptx
@@ -7,7 +7,7 @@
   <p:sldIdLst>
     <p:sldId id="256" r:id="rId7"/>
     <p:sldId id="257" r:id="rId8"/>
-    <p:sldId id="258" r:id="rId9"/>
+    <p:sldId id="258" r:id="rId10"/>
     <p:sldId id="259" r:id="rId11"/>
     <p:sldId id="260" r:id="rId12"/>
     <p:sldId id="261" r:id="rId13"/>
@@ -16,6 +16,8 @@
     <p:sldId id="264" r:id="rId16"/>
     <p:sldId id="265" r:id="rId17"/>
     <p:sldId id="266" r:id="rId18"/>
+    <p:sldId id="267" r:id="rId19"/>
+    <p:sldId id="268" r:id="rId20"/>
   </p:sldIdLst>
   <p:sldSz cx="9144000" cy="6858000" type="screen4x3"/>
   <p:notesSz cx="6858000" cy="9144000"/>
@@ -130,14 +132,16 @@
             <p14:sldId id="260"/>
             <p14:sldId id="261"/>
             <p14:sldId id="262"/>
+            <p14:sldId id="263"/>
           </p14:sldIdLst>
         </p14:section>
         <p14:section name="Closing" id="{00000003-0000-4000-8000-000000000003}">
           <p14:sldIdLst>
-            <p14:sldId id="263"/>
             <p14:sldId id="264"/>
             <p14:sldId id="265"/>
             <p14:sldId id="266"/>
+            <p14:sldId id="267"/>
+            <p14:sldId id="268"/>
           </p14:sldIdLst>
         </p14:section>
       </p14:sectionLst>
@@ -322,6 +326,30 @@
           </c:val>
           <c:smooth val="0"/>
         </c:ser>
+        <c:dLbls>
+          <c:numFmt formatCode="0" sourceLinked="0"/>
+          <c:txPr>
+            <a:bodyPr/>
+            <a:lstStyle/>
+            <a:p>
+              <a:pPr>
+                <a:defRPr sz="900">
+                  <a:solidFill>
+                    <a:srgbClr val="16213F"/>
+                  </a:solidFill>
+                </a:defRPr>
+              </a:pPr>
+            </a:p>
+          </c:txPr>
+          <c:dLblPos val="t"/>
+          <c:showLegendKey val="0"/>
+          <c:showVal val="1"/>
+          <c:showCatName val="0"/>
+          <c:showSerName val="0"/>
+          <c:showPercent val="0"/>
+          <c:showBubbleSize val="0"/>
+          <c:showLeaderLines val="1"/>
+        </c:dLbls>
         <c:marker val="1"/>
         <c:smooth val="0"/>
         <c:axId val="2118791784"/>
@@ -350,9 +378,23 @@
         <c:delete val="0"/>
         <c:axPos val="l"/>
         <c:majorGridlines/>
+        <c:numFmt formatCode="0" sourceLinked="0"/>
         <c:majorTickMark val="out"/>
         <c:minorTickMark val="none"/>
         <c:tickLblPos val="nextTo"/>
+        <c:txPr>
+          <a:bodyPr/>
+          <a:lstStyle/>
+          <a:p>
+            <a:pPr>
+              <a:defRPr>
+                <a:solidFill>
+                  <a:srgbClr val="16213F"/>
+                </a:solidFill>
+              </a:defRPr>
+            </a:pPr>
+          </a:p>
+        </c:txPr>
         <c:crossAx val="2118791784"/>
         <c:crosses val="autoZero"/>
       </c:valAx>
@@ -371,7 +413,9 @@
     <a:lstStyle/>
     <a:p>
       <a:pPr>
-        <a:defRPr sz="1800"/>
+        <a:defRPr sz="1100">
+          <a:latin typeface="Arial"/>
+        </a:defRPr>
       </a:pPr>
       <a:endParaRPr lang="en-US"/>
     </a:p>
@@ -596,6 +640,30 @@
             </c:numRef>
           </c:val>
         </c:ser>
+        <c:dLbls>
+          <c:numFmt formatCode="0" sourceLinked="0"/>
+          <c:txPr>
+            <a:bodyPr/>
+            <a:lstStyle/>
+            <a:p>
+              <a:pPr>
+                <a:defRPr sz="900">
+                  <a:solidFill>
+                    <a:srgbClr val="16213F"/>
+                  </a:solidFill>
+                </a:defRPr>
+              </a:pPr>
+            </a:p>
+          </c:txPr>
+          <c:dLblPos val="outEnd"/>
+          <c:showLegendKey val="0"/>
+          <c:showVal val="1"/>
+          <c:showCatName val="0"/>
+          <c:showSerName val="0"/>
+          <c:showPercent val="0"/>
+          <c:showBubbleSize val="0"/>
+          <c:showLeaderLines val="1"/>
+        </c:dLbls>
         <c:axId val="-2068027336"/>
         <c:axId val="-2113994440"/>
       </c:barChart>
@@ -643,6 +711,7 @@
             </a:ln>
           </c:spPr>
         </c:majorGridlines>
+        <c:numFmt formatCode="0" sourceLinked="0"/>
         <c:majorTickMark val="out"/>
         <c:minorTickMark val="none"/>
         <c:tickLblPos val="nextTo"/>
@@ -677,6 +746,181 @@
         <a:defRPr sz="1800"/>
       </a:pPr>
       <a:endParaRPr lang="en-US"/>
+    </a:p>
+  </c:txPr>
+  <c:externalData r:id="rId1">
+    <c:autoUpdate val="0"/>
+  </c:externalData>
+</c:chartSpace>
+</file>
+
+<file path=ppt/charts/chart3.xml><?xml version="1.0" encoding="utf-8"?>
+<c:chartSpace xmlns:c="http://schemas.openxmlformats.org/drawingml/2006/chart" xmlns:a="http://schemas.openxmlformats.org/drawingml/2006/main" xmlns:r="http://schemas.openxmlformats.org/officeDocument/2006/relationships">
+  <c:date1904 val="0"/>
+  <c:roundedCorners val="0"/>
+  <c:chart>
+    <c:title>
+      <c:tx>
+        <c:rich>
+          <a:bodyPr/>
+          <a:lstStyle/>
+          <a:p>
+            <a:pPr>
+              <a:defRPr sz="1600" b="1">
+                <a:solidFill>
+                  <a:srgbClr val="16213F"/>
+                </a:solidFill>
+              </a:defRPr>
+            </a:pPr>
+            <a:r>
+              <a:t>Revenue mix by region</a:t>
+            </a:r>
+          </a:p>
+        </c:rich>
+      </c:tx>
+      <c:layout/>
+      <c:overlay val="0"/>
+    </c:title>
+    <c:autoTitleDeleted val="0"/>
+    <c:plotArea>
+      <c:layout/>
+      <c:doughnutChart>
+        <c:varyColors val="1"/>
+        <c:ser>
+          <c:idx val="0"/>
+          <c:order val="0"/>
+          <c:tx>
+            <c:strRef>
+              <c:f>Sheet1!$B$1</c:f>
+              <c:strCache>
+                <c:ptCount val="1"/>
+                <c:pt idx="0">
+                  <c:v>Revenue mix</c:v>
+                </c:pt>
+              </c:strCache>
+            </c:strRef>
+          </c:tx>
+          <c:dPt>
+            <c:idx val="0"/>
+            <c:spPr>
+              <a:solidFill>
+                <a:srgbClr val="16213F"/>
+              </a:solidFill>
+            </c:spPr>
+          </c:dPt>
+          <c:dPt>
+            <c:idx val="1"/>
+            <c:spPr>
+              <a:solidFill>
+                <a:srgbClr val="2B7CD3"/>
+              </a:solidFill>
+            </c:spPr>
+          </c:dPt>
+          <c:dPt>
+            <c:idx val="2"/>
+            <c:spPr>
+              <a:solidFill>
+                <a:srgbClr val="E0742B"/>
+              </a:solidFill>
+            </c:spPr>
+          </c:dPt>
+          <c:dPt>
+            <c:idx val="3"/>
+            <c:spPr>
+              <a:solidFill>
+                <a:srgbClr val="5778B0"/>
+              </a:solidFill>
+            </c:spPr>
+          </c:dPt>
+          <c:cat>
+            <c:strRef>
+              <c:f>Sheet1!$A$2:$A$5</c:f>
+              <c:strCache>
+                <c:ptCount val="4"/>
+                <c:pt idx="0">
+                  <c:v>North</c:v>
+                </c:pt>
+                <c:pt idx="1">
+                  <c:v>South</c:v>
+                </c:pt>
+                <c:pt idx="2">
+                  <c:v>East</c:v>
+                </c:pt>
+                <c:pt idx="3">
+                  <c:v>West</c:v>
+                </c:pt>
+              </c:strCache>
+            </c:strRef>
+          </c:cat>
+          <c:val>
+            <c:numRef>
+              <c:f>Sheet1!$B$2:$B$5</c:f>
+              <c:numCache>
+                <c:formatCode>General</c:formatCode>
+                <c:ptCount val="4"/>
+                <c:pt idx="0">
+                  <c:v>0.41</c:v>
+                </c:pt>
+                <c:pt idx="1">
+                  <c:v>0.27</c:v>
+                </c:pt>
+                <c:pt idx="2">
+                  <c:v>0.2</c:v>
+                </c:pt>
+                <c:pt idx="3">
+                  <c:v>0.12</c:v>
+                </c:pt>
+              </c:numCache>
+            </c:numRef>
+          </c:val>
+        </c:ser>
+        <c:dLbls>
+          <c:numFmt formatCode="0%" sourceLinked="0"/>
+          <c:txPr>
+            <a:bodyPr/>
+            <a:lstStyle/>
+            <a:p>
+              <a:pPr>
+                <a:defRPr sz="1100" b="1">
+                  <a:solidFill>
+                    <a:srgbClr val="FFFFFF"/>
+                  </a:solidFill>
+                </a:defRPr>
+              </a:pPr>
+            </a:p>
+          </c:txPr>
+          <c:dLblPos val="ctr"/>
+          <c:showLegendKey val="0"/>
+          <c:showVal val="0"/>
+          <c:showCatName val="0"/>
+          <c:showSerName val="0"/>
+          <c:showPercent val="0"/>
+          <c:showBubbleSize val="0"/>
+          <c:showLeaderLines val="1"/>
+        </c:dLbls>
+        <c:firstSliceAng val="0"/>
+        <c:holeSize val="50"/>
+      </c:doughnutChart>
+    </c:plotArea>
+    <c:legend>
+      <c:legendPos/>
+      <c:layout/>
+      <c:overlay val="0"/>
+    </c:legend>
+    <c:plotVisOnly val="1"/>
+    <c:dispBlanksAs val="gap"/>
+    <c:showDLblsOverMax val="0"/>
+  </c:chart>
+  <c:txPr>
+    <a:bodyPr/>
+    <a:lstStyle/>
+    <a:p>
+      <a:pPr>
+        <a:defRPr sz="1800">
+          <a:latin typeface="Arial"/>
+        </a:defRPr>
+      </a:pPr>
+      <a:endParaRPr/>
     </a:p>
   </c:txPr>
   <c:externalData r:id="rId1">
@@ -1080,7 +1324,567 @@
           <a:lstStyle/>
           <a:p>
             <a:r>
+              <a:t>Speaker notes: walk the three sections top to bottom; flag that the Financials block carries the revenue table, charts and the mix doughnut.</a:t>
+            </a:r>
+          </a:p>
+        </p:txBody>
+      </p:sp>
+      <p:sp>
+        <p:nvSpPr>
+          <p:cNvPr id="4" name="Slide Number Placeholder 3"/>
+          <p:cNvSpPr>
+            <a:spLocks noGrp="1"/>
+          </p:cNvSpPr>
+          <p:nvPr>
+            <p:ph type="sldNum" idx="5" sz="quarter"/>
+          </p:nvPr>
+        </p:nvSpPr>
+        <p:spPr/>
+      </p:sp>
+    </p:spTree>
+  </p:cSld>
+  <p:clrMapOvr>
+    <a:masterClrMapping/>
+  </p:clrMapOvr>
+</p:notes>
+</file>
+
+<file path=ppt/notesSlides/notesSlide2.xml><?xml version="1.0" encoding="utf-8"?>
+<p:notes xmlns:a="http://schemas.openxmlformats.org/drawingml/2006/main" xmlns:p="http://schemas.openxmlformats.org/presentationml/2006/main" xmlns:r="http://schemas.openxmlformats.org/officeDocument/2006/relationships">
+  <p:cSld>
+    <p:spTree>
+      <p:nvGrpSpPr>
+        <p:cNvPr id="1" name=""/>
+        <p:cNvGrpSpPr/>
+        <p:nvPr/>
+      </p:nvGrpSpPr>
+      <p:grpSpPr>
+        <a:xfrm>
+          <a:off x="0" y="0"/>
+          <a:ext cx="0" cy="0"/>
+          <a:chOff x="0" y="0"/>
+          <a:chExt cx="0" cy="0"/>
+        </a:xfrm>
+      </p:grpSpPr>
+      <p:sp>
+        <p:nvSpPr>
+          <p:cNvPr id="2" name="Slide Image Placeholder 1"/>
+          <p:cNvSpPr>
+            <a:spLocks noGrp="1"/>
+          </p:cNvSpPr>
+          <p:nvPr>
+            <p:ph type="sldImg" idx="2"/>
+          </p:nvPr>
+        </p:nvSpPr>
+        <p:spPr/>
+      </p:sp>
+      <p:sp>
+        <p:nvSpPr>
+          <p:cNvPr id="3" name="Notes Placeholder 2"/>
+          <p:cNvSpPr>
+            <a:spLocks noGrp="1"/>
+          </p:cNvSpPr>
+          <p:nvPr>
+            <p:ph type="body" idx="3" sz="quarter"/>
+          </p:nvPr>
+        </p:nvSpPr>
+        <p:spPr/>
+        <p:txBody>
+          <a:bodyPr/>
+          <a:lstStyle/>
+          <a:p>
+            <a:r>
               <a:t>Speaker notes: lead with the 18% YoY headline, then the 230 bps margin expansion. Pause on the input-cost risk before the regional breakdown.</a:t>
+            </a:r>
+          </a:p>
+        </p:txBody>
+      </p:sp>
+      <p:sp>
+        <p:nvSpPr>
+          <p:cNvPr id="4" name="Slide Number Placeholder 3"/>
+          <p:cNvSpPr>
+            <a:spLocks noGrp="1"/>
+          </p:cNvSpPr>
+          <p:nvPr>
+            <p:ph type="sldNum" idx="5" sz="quarter"/>
+          </p:nvPr>
+        </p:nvSpPr>
+        <p:spPr/>
+      </p:sp>
+    </p:spTree>
+  </p:cSld>
+  <p:clrMapOvr>
+    <a:masterClrMapping/>
+  </p:clrMapOvr>
+</p:notes>
+</file>
+
+<file path=ppt/notesSlides/notesSlide3.xml><?xml version="1.0" encoding="utf-8"?>
+<p:notes xmlns:a="http://schemas.openxmlformats.org/drawingml/2006/main" xmlns:p="http://schemas.openxmlformats.org/presentationml/2006/main" xmlns:r="http://schemas.openxmlformats.org/officeDocument/2006/relationships">
+  <p:cSld>
+    <p:spTree>
+      <p:nvGrpSpPr>
+        <p:cNvPr id="1" name=""/>
+        <p:cNvGrpSpPr/>
+        <p:nvPr/>
+      </p:nvGrpSpPr>
+      <p:grpSpPr>
+        <a:xfrm>
+          <a:off x="0" y="0"/>
+          <a:ext cx="0" cy="0"/>
+          <a:chOff x="0" y="0"/>
+          <a:chExt cx="0" cy="0"/>
+        </a:xfrm>
+      </p:grpSpPr>
+      <p:sp>
+        <p:nvSpPr>
+          <p:cNvPr id="2" name="Slide Image Placeholder 1"/>
+          <p:cNvSpPr>
+            <a:spLocks noGrp="1"/>
+          </p:cNvSpPr>
+          <p:nvPr>
+            <p:ph type="sldImg" idx="2"/>
+          </p:nvPr>
+        </p:nvSpPr>
+        <p:spPr/>
+      </p:sp>
+      <p:sp>
+        <p:nvSpPr>
+          <p:cNvPr id="3" name="Notes Placeholder 2"/>
+          <p:cNvSpPr>
+            <a:spLocks noGrp="1"/>
+          </p:cNvSpPr>
+          <p:nvPr>
+            <p:ph type="body" idx="3" sz="quarter"/>
+          </p:nvPr>
+        </p:nvSpPr>
+        <p:spPr/>
+        <p:txBody>
+          <a:bodyPr/>
+          <a:lstStyle/>
+          <a:p>
+            <a:r>
+              <a:t>Speaker notes: anchor on the four headline KPIs, then read the line chart left to right - brand health and adoption both trend up through June.</a:t>
+            </a:r>
+          </a:p>
+        </p:txBody>
+      </p:sp>
+      <p:sp>
+        <p:nvSpPr>
+          <p:cNvPr id="4" name="Slide Number Placeholder 3"/>
+          <p:cNvSpPr>
+            <a:spLocks noGrp="1"/>
+          </p:cNvSpPr>
+          <p:nvPr>
+            <p:ph type="sldNum" idx="5" sz="quarter"/>
+          </p:nvPr>
+        </p:nvSpPr>
+        <p:spPr/>
+      </p:sp>
+    </p:spTree>
+  </p:cSld>
+  <p:clrMapOvr>
+    <a:masterClrMapping/>
+  </p:clrMapOvr>
+</p:notes>
+</file>
+
+<file path=ppt/notesSlides/notesSlide4.xml><?xml version="1.0" encoding="utf-8"?>
+<p:notes xmlns:a="http://schemas.openxmlformats.org/drawingml/2006/main" xmlns:p="http://schemas.openxmlformats.org/presentationml/2006/main" xmlns:r="http://schemas.openxmlformats.org/officeDocument/2006/relationships">
+  <p:cSld>
+    <p:spTree>
+      <p:nvGrpSpPr>
+        <p:cNvPr id="1" name=""/>
+        <p:cNvGrpSpPr/>
+        <p:nvPr/>
+      </p:nvGrpSpPr>
+      <p:grpSpPr>
+        <a:xfrm>
+          <a:off x="0" y="0"/>
+          <a:ext cx="0" cy="0"/>
+          <a:chOff x="0" y="0"/>
+          <a:chExt cx="0" cy="0"/>
+        </a:xfrm>
+      </p:grpSpPr>
+      <p:sp>
+        <p:nvSpPr>
+          <p:cNvPr id="2" name="Slide Image Placeholder 1"/>
+          <p:cNvSpPr>
+            <a:spLocks noGrp="1"/>
+          </p:cNvSpPr>
+          <p:nvPr>
+            <p:ph type="sldImg" idx="2"/>
+          </p:nvPr>
+        </p:nvSpPr>
+        <p:spPr/>
+      </p:sp>
+      <p:sp>
+        <p:nvSpPr>
+          <p:cNvPr id="3" name="Notes Placeholder 2"/>
+          <p:cNvSpPr>
+            <a:spLocks noGrp="1"/>
+          </p:cNvSpPr>
+          <p:nvPr>
+            <p:ph type="body" idx="3" sz="quarter"/>
+          </p:nvPr>
+        </p:nvSpPr>
+        <p:spPr/>
+        <p:txBody>
+          <a:bodyPr/>
+          <a:lstStyle/>
+          <a:p>
+            <a:r>
+              <a:t>Speaker notes: the merged title band names the entity and units; read the totals row last - Q4 at 907 is the strongest quarter.</a:t>
+            </a:r>
+          </a:p>
+        </p:txBody>
+      </p:sp>
+      <p:sp>
+        <p:nvSpPr>
+          <p:cNvPr id="4" name="Slide Number Placeholder 3"/>
+          <p:cNvSpPr>
+            <a:spLocks noGrp="1"/>
+          </p:cNvSpPr>
+          <p:nvPr>
+            <p:ph type="sldNum" idx="5" sz="quarter"/>
+          </p:nvPr>
+        </p:nvSpPr>
+        <p:spPr/>
+      </p:sp>
+    </p:spTree>
+  </p:cSld>
+  <p:clrMapOvr>
+    <a:masterClrMapping/>
+  </p:clrMapOvr>
+</p:notes>
+</file>
+
+<file path=ppt/notesSlides/notesSlide5.xml><?xml version="1.0" encoding="utf-8"?>
+<p:notes xmlns:a="http://schemas.openxmlformats.org/drawingml/2006/main" xmlns:p="http://schemas.openxmlformats.org/presentationml/2006/main" xmlns:r="http://schemas.openxmlformats.org/officeDocument/2006/relationships">
+  <p:cSld>
+    <p:spTree>
+      <p:nvGrpSpPr>
+        <p:cNvPr id="1" name=""/>
+        <p:cNvGrpSpPr/>
+        <p:nvPr/>
+      </p:nvGrpSpPr>
+      <p:grpSpPr>
+        <a:xfrm>
+          <a:off x="0" y="0"/>
+          <a:ext cx="0" cy="0"/>
+          <a:chOff x="0" y="0"/>
+          <a:chExt cx="0" cy="0"/>
+        </a:xfrm>
+      </p:grpSpPr>
+      <p:sp>
+        <p:nvSpPr>
+          <p:cNvPr id="2" name="Slide Image Placeholder 1"/>
+          <p:cNvSpPr>
+            <a:spLocks noGrp="1"/>
+          </p:cNvSpPr>
+          <p:nvPr>
+            <p:ph type="sldImg" idx="2"/>
+          </p:nvPr>
+        </p:nvSpPr>
+        <p:spPr/>
+      </p:sp>
+      <p:sp>
+        <p:nvSpPr>
+          <p:cNvPr id="3" name="Notes Placeholder 2"/>
+          <p:cNvSpPr>
+            <a:spLocks noGrp="1"/>
+          </p:cNvSpPr>
+          <p:nvPr>
+            <p:ph type="body" idx="3" sz="quarter"/>
+          </p:nvPr>
+        </p:nvSpPr>
+        <p:spPr/>
+        <p:txBody>
+          <a:bodyPr/>
+          <a:lstStyle/>
+          <a:p>
+            <a:r>
+              <a:t>Speaker notes: North leads every quarter; East is the recovery story after the Q1 dip - point at the rebound from 168 to 232.</a:t>
+            </a:r>
+          </a:p>
+        </p:txBody>
+      </p:sp>
+      <p:sp>
+        <p:nvSpPr>
+          <p:cNvPr id="4" name="Slide Number Placeholder 3"/>
+          <p:cNvSpPr>
+            <a:spLocks noGrp="1"/>
+          </p:cNvSpPr>
+          <p:nvPr>
+            <p:ph type="sldNum" idx="5" sz="quarter"/>
+          </p:nvPr>
+        </p:nvSpPr>
+        <p:spPr/>
+      </p:sp>
+    </p:spTree>
+  </p:cSld>
+  <p:clrMapOvr>
+    <a:masterClrMapping/>
+  </p:clrMapOvr>
+</p:notes>
+</file>
+
+<file path=ppt/notesSlides/notesSlide6.xml><?xml version="1.0" encoding="utf-8"?>
+<p:notes xmlns:a="http://schemas.openxmlformats.org/drawingml/2006/main" xmlns:p="http://schemas.openxmlformats.org/presentationml/2006/main" xmlns:r="http://schemas.openxmlformats.org/officeDocument/2006/relationships">
+  <p:cSld>
+    <p:spTree>
+      <p:nvGrpSpPr>
+        <p:cNvPr id="1" name=""/>
+        <p:cNvGrpSpPr/>
+        <p:nvPr/>
+      </p:nvGrpSpPr>
+      <p:grpSpPr>
+        <a:xfrm>
+          <a:off x="0" y="0"/>
+          <a:ext cx="0" cy="0"/>
+          <a:chOff x="0" y="0"/>
+          <a:chExt cx="0" cy="0"/>
+        </a:xfrm>
+      </p:grpSpPr>
+      <p:sp>
+        <p:nvSpPr>
+          <p:cNvPr id="2" name="Slide Image Placeholder 1"/>
+          <p:cNvSpPr>
+            <a:spLocks noGrp="1"/>
+          </p:cNvSpPr>
+          <p:nvPr>
+            <p:ph type="sldImg" idx="2"/>
+          </p:nvPr>
+        </p:nvSpPr>
+        <p:spPr/>
+      </p:sp>
+      <p:sp>
+        <p:nvSpPr>
+          <p:cNvPr id="3" name="Notes Placeholder 2"/>
+          <p:cNvSpPr>
+            <a:spLocks noGrp="1"/>
+          </p:cNvSpPr>
+          <p:nvPr>
+            <p:ph type="body" idx="3" sz="quarter"/>
+          </p:nvPr>
+        </p:nvSpPr>
+        <p:spPr/>
+        <p:txBody>
+          <a:bodyPr/>
+          <a:lstStyle/>
+          <a:p>
+            <a:r>
+              <a:t>Speaker notes: the Readiness column colour-codes each area; call out the two amber rows (renderer, deck) as the items needing an owner this week.</a:t>
+            </a:r>
+          </a:p>
+        </p:txBody>
+      </p:sp>
+      <p:sp>
+        <p:nvSpPr>
+          <p:cNvPr id="4" name="Slide Number Placeholder 3"/>
+          <p:cNvSpPr>
+            <a:spLocks noGrp="1"/>
+          </p:cNvSpPr>
+          <p:nvPr>
+            <p:ph type="sldNum" idx="5" sz="quarter"/>
+          </p:nvPr>
+        </p:nvSpPr>
+        <p:spPr/>
+      </p:sp>
+    </p:spTree>
+  </p:cSld>
+  <p:clrMapOvr>
+    <a:masterClrMapping/>
+  </p:clrMapOvr>
+</p:notes>
+</file>
+
+<file path=ppt/notesSlides/notesSlide7.xml><?xml version="1.0" encoding="utf-8"?>
+<p:notes xmlns:a="http://schemas.openxmlformats.org/drawingml/2006/main" xmlns:p="http://schemas.openxmlformats.org/presentationml/2006/main" xmlns:r="http://schemas.openxmlformats.org/officeDocument/2006/relationships">
+  <p:cSld>
+    <p:spTree>
+      <p:nvGrpSpPr>
+        <p:cNvPr id="1" name=""/>
+        <p:cNvGrpSpPr/>
+        <p:nvPr/>
+      </p:nvGrpSpPr>
+      <p:grpSpPr>
+        <a:xfrm>
+          <a:off x="0" y="0"/>
+          <a:ext cx="0" cy="0"/>
+          <a:chOff x="0" y="0"/>
+          <a:chExt cx="0" cy="0"/>
+        </a:xfrm>
+      </p:grpSpPr>
+      <p:sp>
+        <p:nvSpPr>
+          <p:cNvPr id="2" name="Slide Image Placeholder 1"/>
+          <p:cNvSpPr>
+            <a:spLocks noGrp="1"/>
+          </p:cNvSpPr>
+          <p:nvPr>
+            <p:ph type="sldImg" idx="2"/>
+          </p:nvPr>
+        </p:nvSpPr>
+        <p:spPr/>
+      </p:sp>
+      <p:sp>
+        <p:nvSpPr>
+          <p:cNvPr id="3" name="Notes Placeholder 2"/>
+          <p:cNvSpPr>
+            <a:spLocks noGrp="1"/>
+          </p:cNvSpPr>
+          <p:nvPr>
+            <p:ph type="body" idx="3" sz="quarter"/>
+          </p:nvPr>
+        </p:nvSpPr>
+        <p:spPr/>
+        <p:txBody>
+          <a:bodyPr/>
+          <a:lstStyle/>
+          <a:p>
+            <a:r>
+              <a:t>Speaker notes: the wordmark is generated, not a proprietary asset; the caption links to the brand guidelines for the full usage rules.</a:t>
+            </a:r>
+          </a:p>
+        </p:txBody>
+      </p:sp>
+      <p:sp>
+        <p:nvSpPr>
+          <p:cNvPr id="4" name="Slide Number Placeholder 3"/>
+          <p:cNvSpPr>
+            <a:spLocks noGrp="1"/>
+          </p:cNvSpPr>
+          <p:nvPr>
+            <p:ph type="sldNum" idx="5" sz="quarter"/>
+          </p:nvPr>
+        </p:nvSpPr>
+        <p:spPr/>
+      </p:sp>
+    </p:spTree>
+  </p:cSld>
+  <p:clrMapOvr>
+    <a:masterClrMapping/>
+  </p:clrMapOvr>
+</p:notes>
+</file>
+
+<file path=ppt/notesSlides/notesSlide8.xml><?xml version="1.0" encoding="utf-8"?>
+<p:notes xmlns:a="http://schemas.openxmlformats.org/drawingml/2006/main" xmlns:p="http://schemas.openxmlformats.org/presentationml/2006/main" xmlns:r="http://schemas.openxmlformats.org/officeDocument/2006/relationships">
+  <p:cSld>
+    <p:spTree>
+      <p:nvGrpSpPr>
+        <p:cNvPr id="1" name=""/>
+        <p:cNvGrpSpPr/>
+        <p:nvPr/>
+      </p:nvGrpSpPr>
+      <p:grpSpPr>
+        <a:xfrm>
+          <a:off x="0" y="0"/>
+          <a:ext cx="0" cy="0"/>
+          <a:chOff x="0" y="0"/>
+          <a:chExt cx="0" cy="0"/>
+        </a:xfrm>
+      </p:grpSpPr>
+      <p:sp>
+        <p:nvSpPr>
+          <p:cNvPr id="2" name="Slide Image Placeholder 1"/>
+          <p:cNvSpPr>
+            <a:spLocks noGrp="1"/>
+          </p:cNvSpPr>
+          <p:nvPr>
+            <p:ph type="sldImg" idx="2"/>
+          </p:nvPr>
+        </p:nvSpPr>
+        <p:spPr/>
+      </p:sp>
+      <p:sp>
+        <p:nvSpPr>
+          <p:cNvPr id="3" name="Notes Placeholder 2"/>
+          <p:cNvSpPr>
+            <a:spLocks noGrp="1"/>
+          </p:cNvSpPr>
+          <p:nvPr>
+            <p:ph type="body" idx="3" sz="quarter"/>
+          </p:nvPr>
+        </p:nvSpPr>
+        <p:spPr/>
+        <p:txBody>
+          <a:bodyPr/>
+          <a:lstStyle/>
+          <a:p>
+            <a:r>
+              <a:t>Speaker notes: contrast the two columns; the After column is the payoff of authoring the palette and fonts at the theme level.</a:t>
+            </a:r>
+          </a:p>
+        </p:txBody>
+      </p:sp>
+      <p:sp>
+        <p:nvSpPr>
+          <p:cNvPr id="4" name="Slide Number Placeholder 3"/>
+          <p:cNvSpPr>
+            <a:spLocks noGrp="1"/>
+          </p:cNvSpPr>
+          <p:nvPr>
+            <p:ph type="sldNum" idx="5" sz="quarter"/>
+          </p:nvPr>
+        </p:nvSpPr>
+        <p:spPr/>
+      </p:sp>
+    </p:spTree>
+  </p:cSld>
+  <p:clrMapOvr>
+    <a:masterClrMapping/>
+  </p:clrMapOvr>
+</p:notes>
+</file>
+
+<file path=ppt/notesSlides/notesSlide9.xml><?xml version="1.0" encoding="utf-8"?>
+<p:notes xmlns:a="http://schemas.openxmlformats.org/drawingml/2006/main" xmlns:p="http://schemas.openxmlformats.org/presentationml/2006/main" xmlns:r="http://schemas.openxmlformats.org/officeDocument/2006/relationships">
+  <p:cSld>
+    <p:spTree>
+      <p:nvGrpSpPr>
+        <p:cNvPr id="1" name=""/>
+        <p:cNvGrpSpPr/>
+        <p:nvPr/>
+      </p:nvGrpSpPr>
+      <p:grpSpPr>
+        <a:xfrm>
+          <a:off x="0" y="0"/>
+          <a:ext cx="0" cy="0"/>
+          <a:chOff x="0" y="0"/>
+          <a:chExt cx="0" cy="0"/>
+        </a:xfrm>
+      </p:grpSpPr>
+      <p:sp>
+        <p:nvSpPr>
+          <p:cNvPr id="2" name="Slide Image Placeholder 1"/>
+          <p:cNvSpPr>
+            <a:spLocks noGrp="1"/>
+          </p:cNvSpPr>
+          <p:nvPr>
+            <p:ph type="sldImg" idx="2"/>
+          </p:nvPr>
+        </p:nvSpPr>
+        <p:spPr/>
+      </p:sp>
+      <p:sp>
+        <p:nvSpPr>
+          <p:cNvPr id="3" name="Notes Placeholder 2"/>
+          <p:cNvSpPr>
+            <a:spLocks noGrp="1"/>
+          </p:cNvSpPr>
+          <p:nvPr>
+            <p:ph type="body" idx="3" sz="quarter"/>
+          </p:nvPr>
+        </p:nvSpPr>
+        <p:spPr/>
+        <p:txBody>
+          <a:bodyPr/>
+          <a:lstStyle/>
+          <a:p>
+            <a:r>
+              <a:t>Speaker notes: close on the contact line; the address is a live mailto link, so a reader can reach the brand team straight from the deck.</a:t>
             </a:r>
           </a:p>
         </p:txBody>
@@ -4145,7 +4949,7 @@
             <a:avLst/>
           </a:prstGeom>
           <a:solidFill>
-            <a:srgbClr val="E0742B"/>
+            <a:schemeClr val="accent2"/>
           </a:solidFill>
           <a:ln>
             <a:noFill/>
@@ -4184,6 +4988,1003 @@
           <a:xfrm>
             <a:off x="6629400" y="0"/>
             <a:ext cx="2514600" cy="6858000"/>
+          </a:xfrm>
+          <a:prstGeom prst="rect">
+            <a:avLst/>
+          </a:prstGeom>
+          <a:solidFill>
+            <a:schemeClr val="dk1"/>
+          </a:solidFill>
+          <a:ln>
+            <a:noFill/>
+          </a:ln>
+          <a:effectLst/>
+        </p:spPr>
+        <p:style>
+          <a:lnRef idx="1">
+            <a:schemeClr val="accent1"/>
+          </a:lnRef>
+          <a:fillRef idx="3">
+            <a:schemeClr val="accent1"/>
+          </a:fillRef>
+          <a:effectRef idx="2">
+            <a:schemeClr val="accent1"/>
+          </a:effectRef>
+          <a:fontRef idx="minor">
+            <a:schemeClr val="lt1"/>
+          </a:fontRef>
+        </p:style>
+        <p:txBody>
+          <a:bodyPr rtlCol="0" anchor="ctr"/>
+          <a:lstStyle/>
+          <a:p>
+            <a:pPr algn="ctr"/>
+          </a:p>
+        </p:txBody>
+      </p:sp>
+      <p:sp>
+        <p:nvSpPr>
+          <p:cNvPr id="5" name="Rectangle 4"/>
+          <p:cNvSpPr/>
+          <p:nvPr/>
+        </p:nvSpPr>
+        <p:spPr>
+          <a:xfrm>
+            <a:off x="0" y="228600"/>
+            <a:ext cx="9144000" cy="45720"/>
+          </a:xfrm>
+          <a:prstGeom prst="rect">
+            <a:avLst/>
+          </a:prstGeom>
+          <a:solidFill>
+            <a:schemeClr val="accent2"/>
+          </a:solidFill>
+          <a:ln>
+            <a:noFill/>
+          </a:ln>
+          <a:effectLst/>
+        </p:spPr>
+        <p:style>
+          <a:lnRef idx="1">
+            <a:schemeClr val="accent1"/>
+          </a:lnRef>
+          <a:fillRef idx="3">
+            <a:schemeClr val="accent1"/>
+          </a:fillRef>
+          <a:effectRef idx="2">
+            <a:schemeClr val="accent1"/>
+          </a:effectRef>
+          <a:fontRef idx="minor">
+            <a:schemeClr val="lt1"/>
+          </a:fontRef>
+        </p:style>
+        <p:txBody>
+          <a:bodyPr rtlCol="0" anchor="ctr"/>
+          <a:lstStyle/>
+          <a:p>
+            <a:pPr algn="ctr"/>
+          </a:p>
+        </p:txBody>
+      </p:sp>
+      <p:sp>
+        <p:nvSpPr>
+          <p:cNvPr id="4" name="Rectangle 3"/>
+          <p:cNvSpPr/>
+          <p:nvPr/>
+        </p:nvSpPr>
+        <p:spPr>
+          <a:xfrm>
+            <a:off x="0" y="0"/>
+            <a:ext cx="9144000" cy="228600"/>
+          </a:xfrm>
+          <a:prstGeom prst="rect">
+            <a:avLst/>
+          </a:prstGeom>
+          <a:solidFill>
+            <a:schemeClr val="dk1"/>
+          </a:solidFill>
+          <a:ln>
+            <a:noFill/>
+          </a:ln>
+          <a:effectLst/>
+        </p:spPr>
+        <p:style>
+          <a:lnRef idx="1">
+            <a:schemeClr val="accent1"/>
+          </a:lnRef>
+          <a:fillRef idx="3">
+            <a:schemeClr val="accent1"/>
+          </a:fillRef>
+          <a:effectRef idx="2">
+            <a:schemeClr val="accent1"/>
+          </a:effectRef>
+          <a:fontRef idx="minor">
+            <a:schemeClr val="lt1"/>
+          </a:fontRef>
+        </p:style>
+        <p:txBody>
+          <a:bodyPr rtlCol="0" anchor="ctr"/>
+          <a:lstStyle/>
+          <a:p>
+            <a:pPr algn="ctr"/>
+          </a:p>
+        </p:txBody>
+      </p:sp>
+      <p:sp>
+        <p:nvSpPr>
+          <p:cNvPr id="2" name="Title 1"/>
+          <p:cNvSpPr>
+            <a:spLocks noGrp="1"/>
+          </p:cNvSpPr>
+          <p:nvPr>
+            <p:ph type="ctrTitle"/>
+          </p:nvPr>
+        </p:nvSpPr>
+        <p:spPr>
+          <a:xfrm>
+            <a:off x="182880" y="2057400"/>
+            <a:ext cx="5943600" cy="0"/>
+          </a:xfrm>
+        </p:spPr>
+        <p:txBody>
+          <a:bodyPr/>
+          <a:lstStyle/>
+          <a:p>
+            <a:r>
+              <a:rPr sz="4000" b="1">
+                <a:solidFill>
+                  <a:schemeClr val="dk1"/>
+                </a:solidFill>
+              </a:rPr>
+              <a:t>BrandDocs Corp Quarterly Business Review</a:t>
+            </a:r>
+          </a:p>
+        </p:txBody>
+      </p:sp>
+      <p:sp>
+        <p:nvSpPr>
+          <p:cNvPr id="3" name="Subtitle 2"/>
+          <p:cNvSpPr>
+            <a:spLocks noGrp="1"/>
+          </p:cNvSpPr>
+          <p:nvPr>
+            <p:ph type="subTitle" idx="1"/>
+          </p:nvPr>
+        </p:nvSpPr>
+        <p:spPr>
+          <a:xfrm>
+            <a:off x="685800" y="3429000"/>
+            <a:ext cx="5486400" cy="0"/>
+          </a:xfrm>
+        </p:spPr>
+        <p:txBody>
+          <a:bodyPr/>
+          <a:lstStyle/>
+          <a:p>
+            <a:r>
+              <a:rPr sz="2000">
+                <a:solidFill>
+                  <a:srgbClr val="2B7CD3"/>
+                </a:solidFill>
+              </a:rPr>
+              <a:t>FY2026 - Performance, Outlook &amp; Initiatives</a:t>
+            </a:r>
+          </a:p>
+        </p:txBody>
+      </p:sp>
+      <p:pic>
+        <p:nvPicPr>
+          <p:cNvPr id="9" name="Picture 8" descr="branddocs_template_wordmark.png"/>
+          <p:cNvPicPr>
+            <a:picLocks noChangeAspect="1"/>
+          </p:cNvPicPr>
+          <p:nvPr/>
+        </p:nvPicPr>
+        <p:blipFill>
+          <a:blip r:embed="rId2"/>
+          <a:stretch>
+            <a:fillRect/>
+          </a:stretch>
+        </p:blipFill>
+        <p:spPr>
+          <a:xfrm>
+            <a:off x="365760" y="548640"/>
+            <a:ext cx="1645920" cy="411480"/>
+          </a:xfrm>
+          <a:prstGeom prst="rect">
+            <a:avLst/>
+          </a:prstGeom>
+        </p:spPr>
+      </p:pic>
+      <p:sp>
+        <p:nvSpPr>
+          <p:cNvPr id="10" name="Rounded Rectangle 9"/>
+          <p:cNvSpPr/>
+          <p:nvPr/>
+        </p:nvSpPr>
+        <p:spPr>
+          <a:xfrm>
+            <a:off x="6903720" y="1371600"/>
+            <a:ext cx="1943100" cy="823000"/>
+          </a:xfrm>
+          <a:prstGeom prst="roundRect">
+            <a:avLst/>
+          </a:prstGeom>
+          <a:solidFill>
+            <a:schemeClr val="accent1"/>
+          </a:solidFill>
+          <a:ln>
+            <a:noFill/>
+          </a:ln>
+          <a:effectLst/>
+        </p:spPr>
+        <p:style>
+          <a:lnRef idx="1">
+            <a:schemeClr val="accent1"/>
+          </a:lnRef>
+          <a:fillRef idx="3">
+            <a:schemeClr val="accent1"/>
+          </a:fillRef>
+          <a:effectRef idx="2">
+            <a:schemeClr val="accent1"/>
+          </a:effectRef>
+          <a:fontRef idx="minor">
+            <a:schemeClr val="lt1"/>
+          </a:fontRef>
+        </p:style>
+        <p:txBody>
+          <a:bodyPr rtlCol="0" anchor="ctr" lIns="137160" rIns="137160" tIns="91440" bIns="91440"/>
+          <a:lstStyle/>
+          <a:p>
+            <a:pPr algn="ctr"/>
+            <a:r>
+              <a:rPr sz="2400" b="1">
+                <a:solidFill>
+                  <a:srgbClr val="FFFFFF"/>
+                </a:solidFill>
+              </a:rPr>
+              <a:t>18%</a:t>
+            </a:r>
+          </a:p>
+          <a:p>
+            <a:r>
+              <a:rPr sz="1050" b="1">
+                <a:solidFill>
+                  <a:srgbClr val="FFFFFF"/>
+                </a:solidFill>
+              </a:rPr>
+              <a:t>YoY revenue growth</a:t>
+            </a:r>
+          </a:p>
+        </p:txBody>
+      </p:sp>
+      <p:sp>
+        <p:nvSpPr>
+          <p:cNvPr id="11" name="Rounded Rectangle 10"/>
+          <p:cNvSpPr/>
+          <p:nvPr/>
+        </p:nvSpPr>
+        <p:spPr>
+          <a:xfrm>
+            <a:off x="6903720" y="2453640"/>
+            <a:ext cx="1943100" cy="823000"/>
+          </a:xfrm>
+          <a:prstGeom prst="roundRect">
+            <a:avLst/>
+          </a:prstGeom>
+          <a:solidFill>
+            <a:srgbClr val="EAF1FF"/>
+          </a:solidFill>
+          <a:ln>
+            <a:noFill/>
+          </a:ln>
+          <a:effectLst/>
+        </p:spPr>
+        <p:style>
+          <a:lnRef idx="1">
+            <a:schemeClr val="accent1"/>
+          </a:lnRef>
+          <a:fillRef idx="3">
+            <a:schemeClr val="accent1"/>
+          </a:fillRef>
+          <a:effectRef idx="2">
+            <a:schemeClr val="accent1"/>
+          </a:effectRef>
+          <a:fontRef idx="minor">
+            <a:schemeClr val="lt1"/>
+          </a:fontRef>
+        </p:style>
+        <p:txBody>
+          <a:bodyPr rtlCol="0" anchor="ctr" lIns="137160" rIns="137160" tIns="91440" bIns="91440"/>
+          <a:lstStyle/>
+          <a:p>
+            <a:pPr algn="ctr"/>
+            <a:r>
+              <a:rPr sz="2400" b="1">
+                <a:solidFill>
+                  <a:srgbClr val="16213F"/>
+                </a:solidFill>
+              </a:rPr>
+              <a:t>92</a:t>
+            </a:r>
+          </a:p>
+          <a:p>
+            <a:r>
+              <a:rPr sz="1050" b="1">
+                <a:solidFill>
+                  <a:srgbClr val="5778B0"/>
+                </a:solidFill>
+              </a:rPr>
+              <a:t>Brand health index</a:t>
+            </a:r>
+          </a:p>
+        </p:txBody>
+      </p:sp>
+      <p:sp>
+        <p:nvSpPr>
+          <p:cNvPr id="12" name="Rounded Rectangle 11"/>
+          <p:cNvSpPr/>
+          <p:nvPr/>
+        </p:nvSpPr>
+        <p:spPr>
+          <a:xfrm>
+            <a:off x="6903720" y="3535680"/>
+            <a:ext cx="1943100" cy="823000"/>
+          </a:xfrm>
+          <a:prstGeom prst="roundRect">
+            <a:avLst/>
+          </a:prstGeom>
+          <a:solidFill>
+            <a:schemeClr val="accent2"/>
+          </a:solidFill>
+          <a:ln>
+            <a:noFill/>
+          </a:ln>
+          <a:effectLst/>
+        </p:spPr>
+        <p:style>
+          <a:lnRef idx="1">
+            <a:schemeClr val="accent1"/>
+          </a:lnRef>
+          <a:fillRef idx="3">
+            <a:schemeClr val="accent1"/>
+          </a:fillRef>
+          <a:effectRef idx="2">
+            <a:schemeClr val="accent1"/>
+          </a:effectRef>
+          <a:fontRef idx="minor">
+            <a:schemeClr val="lt1"/>
+          </a:fontRef>
+        </p:style>
+        <p:txBody>
+          <a:bodyPr rtlCol="0" anchor="ctr" lIns="137160" rIns="137160" tIns="91440" bIns="91440"/>
+          <a:lstStyle/>
+          <a:p>
+            <a:pPr algn="ctr"/>
+            <a:r>
+              <a:rPr sz="2400" b="1">
+                <a:solidFill>
+                  <a:srgbClr val="FFFFFF"/>
+                </a:solidFill>
+              </a:rPr>
+              <a:t>3</a:t>
+            </a:r>
+          </a:p>
+          <a:p>
+            <a:r>
+              <a:rPr sz="1050" b="1">
+                <a:solidFill>
+                  <a:srgbClr val="FFFFFF"/>
+                </a:solidFill>
+              </a:rPr>
+              <a:t>Office formats audited</a:t>
+            </a:r>
+          </a:p>
+        </p:txBody>
+      </p:sp>
+    </p:spTree>
+  </p:cSld>
+  <p:clrMapOvr>
+    <a:masterClrMapping/>
+  </p:clrMapOvr>
+  <p:transition spd="med">
+    <p:fade/>
+  </p:transition>
+</p:sld>
+</file>
+
+<file path=ppt/slides/slide10.xml><?xml version="1.0" encoding="utf-8"?>
+<p:sld xmlns:a="http://schemas.openxmlformats.org/drawingml/2006/main" xmlns:p="http://schemas.openxmlformats.org/presentationml/2006/main" xmlns:r="http://schemas.openxmlformats.org/officeDocument/2006/relationships">
+  <p:cSld>
+    <p:spTree>
+      <p:nvGrpSpPr>
+        <p:cNvPr id="1" name=""/>
+        <p:cNvGrpSpPr/>
+        <p:nvPr/>
+      </p:nvGrpSpPr>
+      <p:grpSpPr/>
+      <p:sp>
+        <p:nvSpPr>
+          <p:cNvPr id="2" name="Title 1"/>
+          <p:cNvSpPr>
+            <a:spLocks noGrp="1"/>
+          </p:cNvSpPr>
+          <p:nvPr>
+            <p:ph type="title"/>
+          </p:nvPr>
+        </p:nvSpPr>
+        <p:spPr/>
+        <p:txBody>
+          <a:bodyPr/>
+          <a:lstStyle/>
+          <a:p>
+            <a:r>
+              <a:rPr sz="2800" b="1">
+                <a:solidFill>
+                  <a:srgbClr val="16213F"/>
+                </a:solidFill>
+              </a:rPr>
+              <a:t>Before vs After Brand Consistency</a:t>
+            </a:r>
+          </a:p>
+        </p:txBody>
+      </p:sp>
+      <p:sp>
+        <p:nvSpPr>
+          <p:cNvPr id="3" name="Text Placeholder 2"/>
+          <p:cNvSpPr>
+            <a:spLocks noGrp="1"/>
+          </p:cNvSpPr>
+          <p:nvPr>
+            <p:ph type="body" idx="1"/>
+          </p:nvPr>
+        </p:nvSpPr>
+        <p:spPr/>
+        <p:txBody>
+          <a:bodyPr/>
+          <a:lstStyle/>
+          <a:p>
+            <a:r>
+              <a:rPr sz="1800" b="1">
+                <a:solidFill>
+                  <a:srgbClr val="5778B0"/>
+                </a:solidFill>
+              </a:rPr>
+              <a:t>Before</a:t>
+            </a:r>
+          </a:p>
+        </p:txBody>
+      </p:sp>
+      <p:sp>
+        <p:nvSpPr>
+          <p:cNvPr id="4" name="Content Placeholder 3"/>
+          <p:cNvSpPr>
+            <a:spLocks noGrp="1"/>
+          </p:cNvSpPr>
+          <p:nvPr>
+            <p:ph idx="2" sz="half"/>
+          </p:nvPr>
+        </p:nvSpPr>
+        <p:spPr/>
+        <p:txBody>
+          <a:bodyPr/>
+          <a:lstStyle/>
+          <a:p>
+            <a:pPr/>
+            <a:r>
+              <a:rPr sz="1500">
+                <a:solidFill>
+                  <a:srgbClr val="16213F"/>
+                </a:solidFill>
+              </a:rPr>
+              <a:t>Every deck redrew the palette by hand.</a:t>
+            </a:r>
+          </a:p>
+          <a:p>
+            <a:pPr/>
+            <a:r>
+              <a:rPr sz="1500">
+                <a:solidFill>
+                  <a:srgbClr val="16213F"/>
+                </a:solidFill>
+              </a:rPr>
+              <a:t>Fonts drifted slide to slide.</a:t>
+            </a:r>
+          </a:p>
+          <a:p>
+            <a:pPr/>
+            <a:r>
+              <a:rPr sz="1500">
+                <a:solidFill>
+                  <a:srgbClr val="16213F"/>
+                </a:solidFill>
+              </a:rPr>
+              <a:t>No single source of brand truth.</a:t>
+            </a:r>
+          </a:p>
+        </p:txBody>
+      </p:sp>
+      <p:sp>
+        <p:nvSpPr>
+          <p:cNvPr id="5" name="Text Placeholder 4"/>
+          <p:cNvSpPr>
+            <a:spLocks noGrp="1"/>
+          </p:cNvSpPr>
+          <p:nvPr>
+            <p:ph type="body" idx="3" sz="quarter"/>
+          </p:nvPr>
+        </p:nvSpPr>
+        <p:spPr/>
+        <p:txBody>
+          <a:bodyPr/>
+          <a:lstStyle/>
+          <a:p>
+            <a:r>
+              <a:rPr sz="1800" b="1">
+                <a:solidFill>
+                  <a:srgbClr val="2B7CD3"/>
+                </a:solidFill>
+              </a:rPr>
+              <a:t>After</a:t>
+            </a:r>
+          </a:p>
+        </p:txBody>
+      </p:sp>
+      <p:sp>
+        <p:nvSpPr>
+          <p:cNvPr id="6" name="Content Placeholder 5"/>
+          <p:cNvSpPr>
+            <a:spLocks noGrp="1"/>
+          </p:cNvSpPr>
+          <p:nvPr>
+            <p:ph idx="4" sz="quarter"/>
+          </p:nvPr>
+        </p:nvSpPr>
+        <p:spPr/>
+        <p:txBody>
+          <a:bodyPr/>
+          <a:lstStyle/>
+          <a:p>
+            <a:pPr/>
+            <a:r>
+              <a:rPr sz="1500">
+                <a:solidFill>
+                  <a:srgbClr val="16213F"/>
+                </a:solidFill>
+              </a:rPr>
+              <a:t>One BrandDocs theme drives every surface.</a:t>
+            </a:r>
+          </a:p>
+          <a:p>
+            <a:pPr/>
+            <a:r>
+              <a:rPr sz="1500">
+                <a:solidFill>
+                  <a:srgbClr val="16213F"/>
+                </a:solidFill>
+              </a:rPr>
+              <a:t>Arial headings, Calibri body, applied once.</a:t>
+            </a:r>
+          </a:p>
+          <a:p>
+            <a:pPr/>
+            <a:r>
+              <a:rPr sz="1500">
+                <a:solidFill>
+                  <a:srgbClr val="16213F"/>
+                </a:solidFill>
+              </a:rPr>
+              <a:t>Outputs match the template by construction.</a:t>
+            </a:r>
+          </a:p>
+        </p:txBody>
+      </p:sp>
+    </p:spTree>
+  </p:cSld>
+  <p:clrMapOvr>
+    <a:masterClrMapping/>
+  </p:clrMapOvr>
+</p:sld>
+</file>
+
+<file path=ppt/slides/slide11.xml><?xml version="1.0" encoding="utf-8"?>
+<p:sld xmlns:a="http://schemas.openxmlformats.org/drawingml/2006/main" xmlns:p="http://schemas.openxmlformats.org/presentationml/2006/main" xmlns:r="http://schemas.openxmlformats.org/officeDocument/2006/relationships">
+  <p:cSld>
+    <p:spTree>
+      <p:nvGrpSpPr>
+        <p:cNvPr id="1" name=""/>
+        <p:cNvGrpSpPr/>
+        <p:nvPr/>
+      </p:nvGrpSpPr>
+      <p:grpSpPr/>
+      <p:sp>
+        <p:nvSpPr>
+          <p:cNvPr id="2" name="Title 1"/>
+          <p:cNvSpPr>
+            <a:spLocks noGrp="1"/>
+          </p:cNvSpPr>
+          <p:nvPr>
+            <p:ph type="title"/>
+          </p:nvPr>
+        </p:nvSpPr>
+        <p:spPr/>
+        <p:txBody>
+          <a:bodyPr/>
+          <a:lstStyle/>
+          <a:p>
+            <a:r>
+              <a:rPr sz="2800" b="1">
+                <a:solidFill>
+                  <a:srgbClr val="16213F"/>
+                </a:solidFill>
+              </a:rPr>
+              <a:t>Our Approach (SmartArt-style process)</a:t>
+            </a:r>
+          </a:p>
+        </p:txBody>
+      </p:sp>
+      <p:sp>
+        <p:nvSpPr>
+          <p:cNvPr id="3" name="Rounded Rectangle 2"/>
+          <p:cNvSpPr/>
+          <p:nvPr/>
+        </p:nvSpPr>
+        <p:spPr>
+          <a:xfrm>
+            <a:off x="685800" y="2743200"/>
+            <a:ext cx="2286000" cy="1143000"/>
+          </a:xfrm>
+          <a:prstGeom prst="roundRect">
+            <a:avLst/>
+          </a:prstGeom>
+          <a:solidFill>
+            <a:srgbClr val="16213F"/>
+          </a:solidFill>
+          <a:ln w="19050">
+            <a:solidFill>
+              <a:srgbClr val="5778B0"/>
+            </a:solidFill>
+          </a:ln>
+          <a:effectLst/>
+        </p:spPr>
+        <p:style>
+          <a:lnRef idx="1">
+            <a:schemeClr val="accent1"/>
+          </a:lnRef>
+          <a:fillRef idx="3">
+            <a:schemeClr val="accent1"/>
+          </a:fillRef>
+          <a:effectRef idx="2">
+            <a:schemeClr val="accent1"/>
+          </a:effectRef>
+          <a:fontRef idx="minor">
+            <a:schemeClr val="lt1"/>
+          </a:fontRef>
+        </p:style>
+        <p:txBody>
+          <a:bodyPr rtlCol="0" anchor="ctr" wrap="square"/>
+          <a:lstStyle/>
+          <a:p>
+            <a:pPr algn="ctr"/>
+            <a:r>
+              <a:rPr sz="2000" b="1">
+                <a:solidFill>
+                  <a:srgbClr val="FFFFFF"/>
+                </a:solidFill>
+              </a:rPr>
+              <a:t>Discover</a:t>
+            </a:r>
+          </a:p>
+        </p:txBody>
+      </p:sp>
+      <p:sp>
+        <p:nvSpPr>
+          <p:cNvPr id="4" name="TextBox 3"/>
+          <p:cNvSpPr txBox="1"/>
+          <p:nvPr/>
+        </p:nvSpPr>
+        <p:spPr>
+          <a:xfrm>
+            <a:off x="685800" y="3977640"/>
+            <a:ext cx="2286000" cy="457200"/>
+          </a:xfrm>
+          <a:prstGeom prst="rect">
+            <a:avLst/>
+          </a:prstGeom>
+          <a:noFill/>
+        </p:spPr>
+        <p:txBody>
+          <a:bodyPr wrap="square">
+            <a:spAutoFit/>
+          </a:bodyPr>
+          <a:lstStyle/>
+          <a:p>
+            <a:pPr algn="ctr"/>
+            <a:r>
+              <a:rPr sz="1200">
+                <a:solidFill>
+                  <a:srgbClr val="5778B0"/>
+                </a:solidFill>
+              </a:rPr>
+              <a:t>Validate the opportunity</a:t>
+            </a:r>
+          </a:p>
+        </p:txBody>
+      </p:sp>
+      <p:sp>
+        <p:nvSpPr>
+          <p:cNvPr id="5" name="Rounded Rectangle 4"/>
+          <p:cNvSpPr/>
+          <p:nvPr/>
+        </p:nvSpPr>
+        <p:spPr>
+          <a:xfrm>
+            <a:off x="3429000" y="2743200"/>
+            <a:ext cx="2286000" cy="1143000"/>
+          </a:xfrm>
+          <a:prstGeom prst="roundRect">
+            <a:avLst/>
+          </a:prstGeom>
+          <a:solidFill>
+            <a:srgbClr val="2B7CD3"/>
+          </a:solidFill>
+          <a:ln w="19050">
+            <a:solidFill>
+              <a:srgbClr val="5778B0"/>
+            </a:solidFill>
+          </a:ln>
+          <a:effectLst/>
+        </p:spPr>
+        <p:style>
+          <a:lnRef idx="1">
+            <a:schemeClr val="accent1"/>
+          </a:lnRef>
+          <a:fillRef idx="3">
+            <a:schemeClr val="accent1"/>
+          </a:fillRef>
+          <a:effectRef idx="2">
+            <a:schemeClr val="accent1"/>
+          </a:effectRef>
+          <a:fontRef idx="minor">
+            <a:schemeClr val="lt1"/>
+          </a:fontRef>
+        </p:style>
+        <p:txBody>
+          <a:bodyPr rtlCol="0" anchor="ctr" wrap="square"/>
+          <a:lstStyle/>
+          <a:p>
+            <a:pPr algn="ctr"/>
+            <a:r>
+              <a:rPr sz="2000" b="1">
+                <a:solidFill>
+                  <a:srgbClr val="FFFFFF"/>
+                </a:solidFill>
+              </a:rPr>
+              <a:t>Build</a:t>
+            </a:r>
+          </a:p>
+        </p:txBody>
+      </p:sp>
+      <p:cxnSp>
+        <p:nvCxnSpPr>
+          <p:cNvPr id="6" name="Connector 5"/>
+          <p:cNvCxnSpPr/>
+          <p:nvPr/>
+        </p:nvCxnSpPr>
+        <p:spPr>
+          <a:xfrm>
+            <a:off x="2971800" y="3314700"/>
+            <a:ext cx="457200" cy="0"/>
+          </a:xfrm>
+          <a:prstGeom prst="line">
+            <a:avLst/>
+          </a:prstGeom>
+          <a:ln w="31750">
+            <a:solidFill>
+              <a:srgbClr val="5778B0"/>
+            </a:solidFill>
+          </a:ln>
+        </p:spPr>
+        <p:style>
+          <a:lnRef idx="2">
+            <a:schemeClr val="accent1"/>
+          </a:lnRef>
+          <a:fillRef idx="0">
+            <a:schemeClr val="accent1"/>
+          </a:fillRef>
+          <a:effectRef idx="1">
+            <a:schemeClr val="accent1"/>
+          </a:effectRef>
+          <a:fontRef idx="minor">
+            <a:schemeClr val="tx1"/>
+          </a:fontRef>
+        </p:style>
+      </p:cxnSp>
+      <p:sp>
+        <p:nvSpPr>
+          <p:cNvPr id="7" name="TextBox 6"/>
+          <p:cNvSpPr txBox="1"/>
+          <p:nvPr/>
+        </p:nvSpPr>
+        <p:spPr>
+          <a:xfrm>
+            <a:off x="3429000" y="3977640"/>
+            <a:ext cx="2286000" cy="457200"/>
+          </a:xfrm>
+          <a:prstGeom prst="rect">
+            <a:avLst/>
+          </a:prstGeom>
+          <a:noFill/>
+        </p:spPr>
+        <p:txBody>
+          <a:bodyPr wrap="square">
+            <a:spAutoFit/>
+          </a:bodyPr>
+          <a:lstStyle/>
+          <a:p>
+            <a:pPr algn="ctr"/>
+            <a:r>
+              <a:rPr sz="1200">
+                <a:solidFill>
+                  <a:srgbClr val="5778B0"/>
+                </a:solidFill>
+              </a:rPr>
+              <a:t>Ship the MVP</a:t>
+            </a:r>
+          </a:p>
+        </p:txBody>
+      </p:sp>
+      <p:sp>
+        <p:nvSpPr>
+          <p:cNvPr id="8" name="Rounded Rectangle 7"/>
+          <p:cNvSpPr/>
+          <p:nvPr/>
+        </p:nvSpPr>
+        <p:spPr>
+          <a:xfrm>
+            <a:off x="6172200" y="2743200"/>
+            <a:ext cx="2286000" cy="1143000"/>
+          </a:xfrm>
+          <a:prstGeom prst="roundRect">
+            <a:avLst/>
+          </a:prstGeom>
+          <a:solidFill>
+            <a:srgbClr val="E0742B"/>
+          </a:solidFill>
+          <a:ln w="19050">
+            <a:solidFill>
+              <a:srgbClr val="5778B0"/>
+            </a:solidFill>
+          </a:ln>
+          <a:effectLst/>
+        </p:spPr>
+        <p:style>
+          <a:lnRef idx="1">
+            <a:schemeClr val="accent1"/>
+          </a:lnRef>
+          <a:fillRef idx="3">
+            <a:schemeClr val="accent1"/>
+          </a:fillRef>
+          <a:effectRef idx="2">
+            <a:schemeClr val="accent1"/>
+          </a:effectRef>
+          <a:fontRef idx="minor">
+            <a:schemeClr val="lt1"/>
+          </a:fontRef>
+        </p:style>
+        <p:txBody>
+          <a:bodyPr rtlCol="0" anchor="ctr" wrap="square"/>
+          <a:lstStyle/>
+          <a:p>
+            <a:pPr algn="ctr"/>
+            <a:r>
+              <a:rPr sz="2000" b="1">
+                <a:solidFill>
+                  <a:srgbClr val="FFFFFF"/>
+                </a:solidFill>
+              </a:rPr>
+              <a:t>Scale</a:t>
+            </a:r>
+          </a:p>
+        </p:txBody>
+      </p:sp>
+      <p:cxnSp>
+        <p:nvCxnSpPr>
+          <p:cNvPr id="9" name="Connector 8"/>
+          <p:cNvCxnSpPr/>
+          <p:nvPr/>
+        </p:nvCxnSpPr>
+        <p:spPr>
+          <a:xfrm>
+            <a:off x="5715000" y="3314700"/>
+            <a:ext cx="457200" cy="0"/>
+          </a:xfrm>
+          <a:prstGeom prst="line">
+            <a:avLst/>
+          </a:prstGeom>
+          <a:ln w="31750">
+            <a:solidFill>
+              <a:srgbClr val="5778B0"/>
+            </a:solidFill>
+          </a:ln>
+        </p:spPr>
+        <p:style>
+          <a:lnRef idx="2">
+            <a:schemeClr val="accent1"/>
+          </a:lnRef>
+          <a:fillRef idx="0">
+            <a:schemeClr val="accent1"/>
+          </a:fillRef>
+          <a:effectRef idx="1">
+            <a:schemeClr val="accent1"/>
+          </a:effectRef>
+          <a:fontRef idx="minor">
+            <a:schemeClr val="tx1"/>
+          </a:fontRef>
+        </p:style>
+      </p:cxnSp>
+      <p:sp>
+        <p:nvSpPr>
+          <p:cNvPr id="10" name="TextBox 9"/>
+          <p:cNvSpPr txBox="1"/>
+          <p:nvPr/>
+        </p:nvSpPr>
+        <p:spPr>
+          <a:xfrm>
+            <a:off x="6172200" y="3977640"/>
+            <a:ext cx="2286000" cy="457200"/>
+          </a:xfrm>
+          <a:prstGeom prst="rect">
+            <a:avLst/>
+          </a:prstGeom>
+          <a:noFill/>
+        </p:spPr>
+        <p:txBody>
+          <a:bodyPr wrap="square">
+            <a:spAutoFit/>
+          </a:bodyPr>
+          <a:lstStyle/>
+          <a:p>
+            <a:pPr algn="ctr"/>
+            <a:r>
+              <a:rPr sz="1200">
+                <a:solidFill>
+                  <a:srgbClr val="5778B0"/>
+                </a:solidFill>
+              </a:rPr>
+              <a:t>Grow to new regions</a:t>
+            </a:r>
+          </a:p>
+        </p:txBody>
+      </p:sp>
+    </p:spTree>
+  </p:cSld>
+  <p:clrMapOvr>
+    <a:masterClrMapping/>
+  </p:clrMapOvr>
+</p:sld>
+</file>
+
+<file path=ppt/slides/slide12.xml><?xml version="1.0" encoding="utf-8"?>
+<p:sld xmlns:a="http://schemas.openxmlformats.org/drawingml/2006/main" xmlns:p="http://schemas.openxmlformats.org/presentationml/2006/main" xmlns:r="http://schemas.openxmlformats.org/officeDocument/2006/relationships">
+  <p:cSld>
+    <p:spTree>
+      <p:nvGrpSpPr>
+        <p:cNvPr id="1" name=""/>
+        <p:cNvGrpSpPr/>
+        <p:nvPr/>
+      </p:nvGrpSpPr>
+      <p:grpSpPr/>
+      <p:sp>
+        <p:nvSpPr>
+          <p:cNvPr id="5" name="Rectangle 4"/>
+          <p:cNvSpPr/>
+          <p:nvPr/>
+        </p:nvSpPr>
+        <p:spPr>
+          <a:xfrm>
+            <a:off x="0" y="6629400"/>
+            <a:ext cx="9144000" cy="228600"/>
           </a:xfrm>
           <a:prstGeom prst="rect">
             <a:avLst/>
@@ -4220,7 +6021,7 @@
       </p:sp>
       <p:sp>
         <p:nvSpPr>
-          <p:cNvPr id="5" name="Rectangle 4"/>
+          <p:cNvPr id="4" name="Rectangle 3"/>
           <p:cNvSpPr/>
           <p:nvPr/>
         </p:nvSpPr>
@@ -4264,7 +6065,7 @@
       </p:sp>
       <p:sp>
         <p:nvSpPr>
-          <p:cNvPr id="4" name="Rectangle 3"/>
+          <p:cNvPr id="3" name="Rectangle 2"/>
           <p:cNvSpPr/>
           <p:nvPr/>
         </p:nvSpPr>
@@ -4313,267 +6114,16 @@
             <a:spLocks noGrp="1"/>
           </p:cNvSpPr>
           <p:nvPr>
-            <p:ph type="ctrTitle"/>
-          </p:nvPr>
-        </p:nvSpPr>
-        <p:spPr>
-          <a:xfrm>
-            <a:off x="182880" y="2057400"/>
-            <a:ext cx="5943600" cy="0"/>
-          </a:xfrm>
-        </p:spPr>
+            <p:ph type="title"/>
+          </p:nvPr>
+        </p:nvSpPr>
+        <p:spPr/>
         <p:txBody>
           <a:bodyPr/>
           <a:lstStyle/>
           <a:p>
             <a:r>
-              <a:rPr sz="4000" b="1">
-                <a:solidFill>
-                  <a:srgbClr val="16213F"/>
-                </a:solidFill>
-              </a:rPr>
-              <a:t>BrandDocs Corp Quarterly Business Review</a:t>
-            </a:r>
-          </a:p>
-        </p:txBody>
-      </p:sp>
-      <p:sp>
-        <p:nvSpPr>
-          <p:cNvPr id="3" name="Subtitle 2"/>
-          <p:cNvSpPr>
-            <a:spLocks noGrp="1"/>
-          </p:cNvSpPr>
-          <p:nvPr>
-            <p:ph type="subTitle" idx="1"/>
-          </p:nvPr>
-        </p:nvSpPr>
-        <p:spPr>
-          <a:xfrm>
-            <a:off x="685800" y="3429000"/>
-            <a:ext cx="5486400" cy="0"/>
-          </a:xfrm>
-        </p:spPr>
-        <p:txBody>
-          <a:bodyPr/>
-          <a:lstStyle/>
-          <a:p>
-            <a:r>
-              <a:rPr sz="2000">
-                <a:solidFill>
-                  <a:srgbClr val="2B7CD3"/>
-                </a:solidFill>
-              </a:rPr>
-              <a:t>FY2026 - Performance, Outlook &amp; Initiatives</a:t>
-            </a:r>
-          </a:p>
-        </p:txBody>
-      </p:sp>
-      <p:pic>
-        <p:nvPicPr>
-          <p:cNvPr id="9" name="Picture 8" descr="branddocs_template_wordmark.png"/>
-          <p:cNvPicPr>
-            <a:picLocks noChangeAspect="1"/>
-          </p:cNvPicPr>
-          <p:nvPr/>
-        </p:nvPicPr>
-        <p:blipFill>
-          <a:blip r:embed="rId2"/>
-          <a:stretch>
-            <a:fillRect/>
-          </a:stretch>
-        </p:blipFill>
-        <p:spPr>
-          <a:xfrm>
-            <a:off x="365760" y="548640"/>
-            <a:ext cx="1645920" cy="411480"/>
-          </a:xfrm>
-          <a:prstGeom prst="rect">
-            <a:avLst/>
-          </a:prstGeom>
-        </p:spPr>
-      </p:pic>
-      <p:sp>
-        <p:nvSpPr>
-          <p:cNvPr id="10" name="Rounded Rectangle 9"/>
-          <p:cNvSpPr/>
-          <p:nvPr/>
-        </p:nvSpPr>
-        <p:spPr>
-          <a:xfrm>
-            <a:off x="6903720" y="1371600"/>
-            <a:ext cx="1943100" cy="823000"/>
-          </a:xfrm>
-          <a:prstGeom prst="roundRect">
-            <a:avLst/>
-          </a:prstGeom>
-          <a:solidFill>
-            <a:srgbClr val="2B7CD3"/>
-          </a:solidFill>
-          <a:ln>
-            <a:noFill/>
-          </a:ln>
-          <a:effectLst/>
-        </p:spPr>
-        <p:style>
-          <a:lnRef idx="1">
-            <a:schemeClr val="accent1"/>
-          </a:lnRef>
-          <a:fillRef idx="3">
-            <a:schemeClr val="accent1"/>
-          </a:fillRef>
-          <a:effectRef idx="2">
-            <a:schemeClr val="accent1"/>
-          </a:effectRef>
-          <a:fontRef idx="minor">
-            <a:schemeClr val="lt1"/>
-          </a:fontRef>
-        </p:style>
-        <p:txBody>
-          <a:bodyPr rtlCol="0" anchor="ctr" lIns="137160" rIns="137160" tIns="91440" bIns="91440"/>
-          <a:lstStyle/>
-          <a:p>
-            <a:pPr algn="ctr"/>
-            <a:r>
-              <a:rPr sz="2400" b="1">
-                <a:solidFill>
-                  <a:srgbClr val="FFFFFF"/>
-                </a:solidFill>
-              </a:rPr>
-              <a:t>18%</a:t>
-            </a:r>
-          </a:p>
-          <a:p>
-            <a:r>
-              <a:rPr sz="1050" b="1">
-                <a:solidFill>
-                  <a:srgbClr val="FFFFFF"/>
-                </a:solidFill>
-              </a:rPr>
-              <a:t>YoY revenue growth</a:t>
-            </a:r>
-          </a:p>
-        </p:txBody>
-      </p:sp>
-      <p:sp>
-        <p:nvSpPr>
-          <p:cNvPr id="11" name="Rounded Rectangle 10"/>
-          <p:cNvSpPr/>
-          <p:nvPr/>
-        </p:nvSpPr>
-        <p:spPr>
-          <a:xfrm>
-            <a:off x="6903720" y="2453640"/>
-            <a:ext cx="1943100" cy="823000"/>
-          </a:xfrm>
-          <a:prstGeom prst="roundRect">
-            <a:avLst/>
-          </a:prstGeom>
-          <a:solidFill>
-            <a:srgbClr val="EAF1FF"/>
-          </a:solidFill>
-          <a:ln>
-            <a:noFill/>
-          </a:ln>
-          <a:effectLst/>
-        </p:spPr>
-        <p:style>
-          <a:lnRef idx="1">
-            <a:schemeClr val="accent1"/>
-          </a:lnRef>
-          <a:fillRef idx="3">
-            <a:schemeClr val="accent1"/>
-          </a:fillRef>
-          <a:effectRef idx="2">
-            <a:schemeClr val="accent1"/>
-          </a:effectRef>
-          <a:fontRef idx="minor">
-            <a:schemeClr val="lt1"/>
-          </a:fontRef>
-        </p:style>
-        <p:txBody>
-          <a:bodyPr rtlCol="0" anchor="ctr" lIns="137160" rIns="137160" tIns="91440" bIns="91440"/>
-          <a:lstStyle/>
-          <a:p>
-            <a:pPr algn="ctr"/>
-            <a:r>
-              <a:rPr sz="2400" b="1">
-                <a:solidFill>
-                  <a:srgbClr val="16213F"/>
-                </a:solidFill>
-              </a:rPr>
-              <a:t>92</a:t>
-            </a:r>
-          </a:p>
-          <a:p>
-            <a:r>
-              <a:rPr sz="1050" b="1">
-                <a:solidFill>
-                  <a:srgbClr val="5778B0"/>
-                </a:solidFill>
-              </a:rPr>
-              <a:t>Brand health index</a:t>
-            </a:r>
-          </a:p>
-        </p:txBody>
-      </p:sp>
-      <p:sp>
-        <p:nvSpPr>
-          <p:cNvPr id="12" name="Rounded Rectangle 11"/>
-          <p:cNvSpPr/>
-          <p:nvPr/>
-        </p:nvSpPr>
-        <p:spPr>
-          <a:xfrm>
-            <a:off x="6903720" y="3535680"/>
-            <a:ext cx="1943100" cy="823000"/>
-          </a:xfrm>
-          <a:prstGeom prst="roundRect">
-            <a:avLst/>
-          </a:prstGeom>
-          <a:solidFill>
-            <a:srgbClr val="E0742B"/>
-          </a:solidFill>
-          <a:ln>
-            <a:noFill/>
-          </a:ln>
-          <a:effectLst/>
-        </p:spPr>
-        <p:style>
-          <a:lnRef idx="1">
-            <a:schemeClr val="accent1"/>
-          </a:lnRef>
-          <a:fillRef idx="3">
-            <a:schemeClr val="accent1"/>
-          </a:fillRef>
-          <a:effectRef idx="2">
-            <a:schemeClr val="accent1"/>
-          </a:effectRef>
-          <a:fontRef idx="minor">
-            <a:schemeClr val="lt1"/>
-          </a:fontRef>
-        </p:style>
-        <p:txBody>
-          <a:bodyPr rtlCol="0" anchor="ctr" lIns="137160" rIns="137160" tIns="91440" bIns="91440"/>
-          <a:lstStyle/>
-          <a:p>
-            <a:pPr algn="ctr"/>
-            <a:r>
-              <a:rPr sz="2400" b="1">
-                <a:solidFill>
-                  <a:srgbClr val="FFFFFF"/>
-                </a:solidFill>
-              </a:rPr>
-              <a:t>3</a:t>
-            </a:r>
-          </a:p>
-          <a:p>
-            <a:r>
-              <a:rPr sz="1050" b="1">
-                <a:solidFill>
-                  <a:srgbClr val="FFFFFF"/>
-                </a:solidFill>
-              </a:rPr>
-              <a:t>Office formats audited</a:t>
+              <a:t>Click to edit Master title style</a:t>
             </a:r>
           </a:p>
         </p:txBody>
@@ -4586,178 +6136,7 @@
 </p:sld>
 </file>
 
-<file path=ppt/slides/slide10.xml><?xml version="1.0" encoding="utf-8"?>
-<p:sld xmlns:a="http://schemas.openxmlformats.org/drawingml/2006/main" xmlns:p="http://schemas.openxmlformats.org/presentationml/2006/main" xmlns:r="http://schemas.openxmlformats.org/officeDocument/2006/relationships">
-  <p:cSld>
-    <p:spTree>
-      <p:nvGrpSpPr>
-        <p:cNvPr id="1" name=""/>
-        <p:cNvGrpSpPr/>
-        <p:nvPr/>
-      </p:nvGrpSpPr>
-      <p:grpSpPr/>
-      <p:sp>
-        <p:nvSpPr>
-          <p:cNvPr id="5" name="Rectangle 4"/>
-          <p:cNvSpPr/>
-          <p:nvPr/>
-        </p:nvSpPr>
-        <p:spPr>
-          <a:xfrm>
-            <a:off x="0" y="6629400"/>
-            <a:ext cx="9144000" cy="228600"/>
-          </a:xfrm>
-          <a:prstGeom prst="rect">
-            <a:avLst/>
-          </a:prstGeom>
-          <a:solidFill>
-            <a:srgbClr val="16213F"/>
-          </a:solidFill>
-          <a:ln>
-            <a:noFill/>
-          </a:ln>
-          <a:effectLst/>
-        </p:spPr>
-        <p:style>
-          <a:lnRef idx="1">
-            <a:schemeClr val="accent1"/>
-          </a:lnRef>
-          <a:fillRef idx="3">
-            <a:schemeClr val="accent1"/>
-          </a:fillRef>
-          <a:effectRef idx="2">
-            <a:schemeClr val="accent1"/>
-          </a:effectRef>
-          <a:fontRef idx="minor">
-            <a:schemeClr val="lt1"/>
-          </a:fontRef>
-        </p:style>
-        <p:txBody>
-          <a:bodyPr rtlCol="0" anchor="ctr"/>
-          <a:lstStyle/>
-          <a:p>
-            <a:pPr algn="ctr"/>
-          </a:p>
-        </p:txBody>
-      </p:sp>
-      <p:sp>
-        <p:nvSpPr>
-          <p:cNvPr id="4" name="Rectangle 3"/>
-          <p:cNvSpPr/>
-          <p:nvPr/>
-        </p:nvSpPr>
-        <p:spPr>
-          <a:xfrm>
-            <a:off x="0" y="228600"/>
-            <a:ext cx="9144000" cy="45720"/>
-          </a:xfrm>
-          <a:prstGeom prst="rect">
-            <a:avLst/>
-          </a:prstGeom>
-          <a:solidFill>
-            <a:srgbClr val="E0742B"/>
-          </a:solidFill>
-          <a:ln>
-            <a:noFill/>
-          </a:ln>
-          <a:effectLst/>
-        </p:spPr>
-        <p:style>
-          <a:lnRef idx="1">
-            <a:schemeClr val="accent1"/>
-          </a:lnRef>
-          <a:fillRef idx="3">
-            <a:schemeClr val="accent1"/>
-          </a:fillRef>
-          <a:effectRef idx="2">
-            <a:schemeClr val="accent1"/>
-          </a:effectRef>
-          <a:fontRef idx="minor">
-            <a:schemeClr val="lt1"/>
-          </a:fontRef>
-        </p:style>
-        <p:txBody>
-          <a:bodyPr rtlCol="0" anchor="ctr"/>
-          <a:lstStyle/>
-          <a:p>
-            <a:pPr algn="ctr"/>
-          </a:p>
-        </p:txBody>
-      </p:sp>
-      <p:sp>
-        <p:nvSpPr>
-          <p:cNvPr id="3" name="Rectangle 2"/>
-          <p:cNvSpPr/>
-          <p:nvPr/>
-        </p:nvSpPr>
-        <p:spPr>
-          <a:xfrm>
-            <a:off x="0" y="0"/>
-            <a:ext cx="9144000" cy="228600"/>
-          </a:xfrm>
-          <a:prstGeom prst="rect">
-            <a:avLst/>
-          </a:prstGeom>
-          <a:solidFill>
-            <a:srgbClr val="16213F"/>
-          </a:solidFill>
-          <a:ln>
-            <a:noFill/>
-          </a:ln>
-          <a:effectLst/>
-        </p:spPr>
-        <p:style>
-          <a:lnRef idx="1">
-            <a:schemeClr val="accent1"/>
-          </a:lnRef>
-          <a:fillRef idx="3">
-            <a:schemeClr val="accent1"/>
-          </a:fillRef>
-          <a:effectRef idx="2">
-            <a:schemeClr val="accent1"/>
-          </a:effectRef>
-          <a:fontRef idx="minor">
-            <a:schemeClr val="lt1"/>
-          </a:fontRef>
-        </p:style>
-        <p:txBody>
-          <a:bodyPr rtlCol="0" anchor="ctr"/>
-          <a:lstStyle/>
-          <a:p>
-            <a:pPr algn="ctr"/>
-          </a:p>
-        </p:txBody>
-      </p:sp>
-      <p:sp>
-        <p:nvSpPr>
-          <p:cNvPr id="2" name="Title 1"/>
-          <p:cNvSpPr>
-            <a:spLocks noGrp="1"/>
-          </p:cNvSpPr>
-          <p:nvPr>
-            <p:ph type="title"/>
-          </p:nvPr>
-        </p:nvSpPr>
-        <p:spPr/>
-        <p:txBody>
-          <a:bodyPr/>
-          <a:lstStyle/>
-          <a:p>
-            <a:r>
-              <a:t>Click to edit Master title style</a:t>
-            </a:r>
-          </a:p>
-        </p:txBody>
-      </p:sp>
-    </p:spTree>
-  </p:cSld>
-  <p:clrMapOvr>
-    <a:masterClrMapping/>
-  </p:clrMapOvr>
-</p:sld>
-</file>
-
-<file path=ppt/slides/slide11.xml><?xml version="1.0" encoding="utf-8"?>
+<file path=ppt/slides/slide13.xml><?xml version="1.0" encoding="utf-8"?>
 <p:sld xmlns:a="http://schemas.openxmlformats.org/drawingml/2006/main" xmlns:p="http://schemas.openxmlformats.org/presentationml/2006/main" xmlns:r="http://schemas.openxmlformats.org/officeDocument/2006/relationships">
   <p:cSld>
     <p:spTree>
@@ -4869,7 +6248,13 @@
                   <a:srgbClr val="16213F"/>
                 </a:solidFill>
               </a:rPr>
-              <a:t>Questions? hello@branddocs.example</a:t>
+              <a:t>Questions? </a:t>
+            </a:r>
+            <a:r>
+              <a:rPr sz="1800">
+                <a:hlinkClick r:id="rId2"/>
+              </a:rPr>
+              <a:t>hello@branddocs.example</a:t>
             </a:r>
           </a:p>
           <a:p>
@@ -4918,7 +6303,7 @@
             <a:avLst/>
           </a:prstGeom>
           <a:solidFill>
-            <a:srgbClr val="E0742B"/>
+            <a:schemeClr val="accent2"/>
           </a:solidFill>
           <a:ln>
             <a:noFill/>
@@ -5553,8 +6938,8 @@
           <p:nvPr/>
         </p:nvGraphicFramePr>
         <p:xfrm>
-          <a:off x="457200" y="1828800"/>
-          <a:ext cx="8229600" cy="2743200"/>
+          <a:off x="457200" y="1645920"/>
+          <a:ext cx="8229600" cy="2926080"/>
         </p:xfrm>
         <a:graphic>
           <a:graphicData uri="http://schemas.openxmlformats.org/drawingml/2006/table">
@@ -5569,7 +6954,63 @@
                 <a:gridCol w="1645920"/>
                 <a:gridCol w="1645920"/>
               </a:tblGrid>
-              <a:tr h="548640">
+              <a:tr h="487680">
+                <a:tc gridSpan="5">
+                  <a:txBody>
+                    <a:bodyPr/>
+                    <a:lstStyle/>
+                    <a:p>
+                      <a:pPr algn="ctr"/>
+                      <a:r>
+                        <a:rPr b="1" sz="1500">
+                          <a:solidFill>
+                            <a:srgbClr val="FFFFFF"/>
+                          </a:solidFill>
+                        </a:rPr>
+                        <a:t>BrandDocs Corp - FY2026 (USD thousands)</a:t>
+                      </a:r>
+                    </a:p>
+                  </a:txBody>
+                  <a:tcPr>
+                    <a:solidFill>
+                      <a:srgbClr val="16213F"/>
+                    </a:solidFill>
+                  </a:tcPr>
+                </a:tc>
+                <a:tc hMerge="1">
+                  <a:txBody>
+                    <a:bodyPr/>
+                    <a:lstStyle/>
+                    <a:p/>
+                  </a:txBody>
+                  <a:tcPr/>
+                </a:tc>
+                <a:tc hMerge="1">
+                  <a:txBody>
+                    <a:bodyPr/>
+                    <a:lstStyle/>
+                    <a:p/>
+                  </a:txBody>
+                  <a:tcPr/>
+                </a:tc>
+                <a:tc hMerge="1">
+                  <a:txBody>
+                    <a:bodyPr/>
+                    <a:lstStyle/>
+                    <a:p/>
+                  </a:txBody>
+                  <a:tcPr/>
+                </a:tc>
+                <a:tc hMerge="1">
+                  <a:txBody>
+                    <a:bodyPr/>
+                    <a:lstStyle/>
+                    <a:p/>
+                  </a:txBody>
+                  <a:tcPr/>
+                </a:tc>
+              </a:tr>
+              <a:tr h="487680">
                 <a:tc>
                   <a:txBody>
                     <a:bodyPr/>
@@ -5676,7 +7117,7 @@
                   </a:tcPr>
                 </a:tc>
               </a:tr>
-              <a:tr h="548640">
+              <a:tr h="487680">
                 <a:tc>
                   <a:txBody>
                     <a:bodyPr/>
@@ -5689,6 +7130,113 @@
                           </a:solidFill>
                         </a:rPr>
                         <a:t>North</a:t>
+                      </a:r>
+                    </a:p>
+                  </a:txBody>
+                  <a:tcPr>
+                    <a:solidFill>
+                      <a:srgbClr val="FFFFFF"/>
+                    </a:solidFill>
+                  </a:tcPr>
+                </a:tc>
+                <a:tc>
+                  <a:txBody>
+                    <a:bodyPr/>
+                    <a:lstStyle/>
+                    <a:p>
+                      <a:r>
+                        <a:rPr sz="1400">
+                          <a:solidFill>
+                            <a:srgbClr val="16213F"/>
+                          </a:solidFill>
+                        </a:rPr>
+                        <a:t>320</a:t>
+                      </a:r>
+                    </a:p>
+                  </a:txBody>
+                  <a:tcPr>
+                    <a:solidFill>
+                      <a:srgbClr val="FFFFFF"/>
+                    </a:solidFill>
+                  </a:tcPr>
+                </a:tc>
+                <a:tc>
+                  <a:txBody>
+                    <a:bodyPr/>
+                    <a:lstStyle/>
+                    <a:p>
+                      <a:r>
+                        <a:rPr sz="1400">
+                          <a:solidFill>
+                            <a:srgbClr val="16213F"/>
+                          </a:solidFill>
+                        </a:rPr>
+                        <a:t>351</a:t>
+                      </a:r>
+                    </a:p>
+                  </a:txBody>
+                  <a:tcPr>
+                    <a:solidFill>
+                      <a:srgbClr val="FFFFFF"/>
+                    </a:solidFill>
+                  </a:tcPr>
+                </a:tc>
+                <a:tc>
+                  <a:txBody>
+                    <a:bodyPr/>
+                    <a:lstStyle/>
+                    <a:p>
+                      <a:r>
+                        <a:rPr sz="1400">
+                          <a:solidFill>
+                            <a:srgbClr val="16213F"/>
+                          </a:solidFill>
+                        </a:rPr>
+                        <a:t>372</a:t>
+                      </a:r>
+                    </a:p>
+                  </a:txBody>
+                  <a:tcPr>
+                    <a:solidFill>
+                      <a:srgbClr val="FFFFFF"/>
+                    </a:solidFill>
+                  </a:tcPr>
+                </a:tc>
+                <a:tc>
+                  <a:txBody>
+                    <a:bodyPr/>
+                    <a:lstStyle/>
+                    <a:p>
+                      <a:r>
+                        <a:rPr sz="1400">
+                          <a:solidFill>
+                            <a:srgbClr val="16213F"/>
+                          </a:solidFill>
+                        </a:rPr>
+                        <a:t>410</a:t>
+                      </a:r>
+                    </a:p>
+                  </a:txBody>
+                  <a:tcPr>
+                    <a:solidFill>
+                      <a:srgbClr val="FFFFFF"/>
+                    </a:solidFill>
+                  </a:tcPr>
+                </a:tc>
+              </a:tr>
+              <a:tr h="487680">
+                <a:tc>
+                  <a:txBody>
+                    <a:bodyPr/>
+                    <a:lstStyle/>
+                    <a:p>
+                      <a:r>
+                        <a:rPr sz="1400">
+                          <a:solidFill>
+                            <a:srgbClr val="16213F"/>
+                          </a:solidFill>
+                        </a:rPr>
+                        <a:t>South</a:t>
                       </a:r>
                     </a:p>
                   </a:txBody>
@@ -5709,7 +7257,7 @@
                             <a:srgbClr val="16213F"/>
                           </a:solidFill>
                         </a:rPr>
-                        <a:t>320</a:t>
+                        <a:t>210</a:t>
                       </a:r>
                     </a:p>
                   </a:txBody>
@@ -5730,7 +7278,7 @@
                             <a:srgbClr val="16213F"/>
                           </a:solidFill>
                         </a:rPr>
-                        <a:t>351</a:t>
+                        <a:t>228</a:t>
                       </a:r>
                     </a:p>
                   </a:txBody>
@@ -5751,7 +7299,7 @@
                             <a:srgbClr val="16213F"/>
                           </a:solidFill>
                         </a:rPr>
-                        <a:t>372</a:t>
+                        <a:t>241</a:t>
                       </a:r>
                     </a:p>
                   </a:txBody>
@@ -5772,7 +7320,7 @@
                             <a:srgbClr val="16213F"/>
                           </a:solidFill>
                         </a:rPr>
-                        <a:t>410</a:t>
+                        <a:t>265</a:t>
                       </a:r>
                     </a:p>
                   </a:txBody>
@@ -5783,7 +7331,7 @@
                   </a:tcPr>
                 </a:tc>
               </a:tr>
-              <a:tr h="548640">
+              <a:tr h="487680">
                 <a:tc>
                   <a:txBody>
                     <a:bodyPr/>
@@ -5795,7 +7343,7 @@
                             <a:srgbClr val="16213F"/>
                           </a:solidFill>
                         </a:rPr>
-                        <a:t>South</a:t>
+                        <a:t>East</a:t>
                       </a:r>
                     </a:p>
                   </a:txBody>
@@ -5816,7 +7364,7 @@
                             <a:srgbClr val="16213F"/>
                           </a:solidFill>
                         </a:rPr>
-                        <a:t>210</a:t>
+                        <a:t>175</a:t>
                       </a:r>
                     </a:p>
                   </a:txBody>
@@ -5837,7 +7385,7 @@
                             <a:srgbClr val="16213F"/>
                           </a:solidFill>
                         </a:rPr>
-                        <a:t>228</a:t>
+                        <a:t>168</a:t>
                       </a:r>
                     </a:p>
                   </a:txBody>
@@ -5858,7 +7406,7 @@
                             <a:srgbClr val="16213F"/>
                           </a:solidFill>
                         </a:rPr>
-                        <a:t>241</a:t>
+                        <a:t>199</a:t>
                       </a:r>
                     </a:p>
                   </a:txBody>
@@ -5879,7 +7427,7 @@
                             <a:srgbClr val="16213F"/>
                           </a:solidFill>
                         </a:rPr>
-                        <a:t>265</a:t>
+                        <a:t>232</a:t>
                       </a:r>
                     </a:p>
                   </a:txBody>
@@ -5890,114 +7438,7 @@
                   </a:tcPr>
                 </a:tc>
               </a:tr>
-              <a:tr h="548640">
-                <a:tc>
-                  <a:txBody>
-                    <a:bodyPr/>
-                    <a:lstStyle/>
-                    <a:p>
-                      <a:r>
-                        <a:rPr sz="1400">
-                          <a:solidFill>
-                            <a:srgbClr val="16213F"/>
-                          </a:solidFill>
-                        </a:rPr>
-                        <a:t>East</a:t>
-                      </a:r>
-                    </a:p>
-                  </a:txBody>
-                  <a:tcPr>
-                    <a:solidFill>
-                      <a:srgbClr val="EAF1FF"/>
-                    </a:solidFill>
-                  </a:tcPr>
-                </a:tc>
-                <a:tc>
-                  <a:txBody>
-                    <a:bodyPr/>
-                    <a:lstStyle/>
-                    <a:p>
-                      <a:r>
-                        <a:rPr sz="1400">
-                          <a:solidFill>
-                            <a:srgbClr val="16213F"/>
-                          </a:solidFill>
-                        </a:rPr>
-                        <a:t>175</a:t>
-                      </a:r>
-                    </a:p>
-                  </a:txBody>
-                  <a:tcPr>
-                    <a:solidFill>
-                      <a:srgbClr val="EAF1FF"/>
-                    </a:solidFill>
-                  </a:tcPr>
-                </a:tc>
-                <a:tc>
-                  <a:txBody>
-                    <a:bodyPr/>
-                    <a:lstStyle/>
-                    <a:p>
-                      <a:r>
-                        <a:rPr sz="1400">
-                          <a:solidFill>
-                            <a:srgbClr val="16213F"/>
-                          </a:solidFill>
-                        </a:rPr>
-                        <a:t>168</a:t>
-                      </a:r>
-                    </a:p>
-                  </a:txBody>
-                  <a:tcPr>
-                    <a:solidFill>
-                      <a:srgbClr val="EAF1FF"/>
-                    </a:solidFill>
-                  </a:tcPr>
-                </a:tc>
-                <a:tc>
-                  <a:txBody>
-                    <a:bodyPr/>
-                    <a:lstStyle/>
-                    <a:p>
-                      <a:r>
-                        <a:rPr sz="1400">
-                          <a:solidFill>
-                            <a:srgbClr val="16213F"/>
-                          </a:solidFill>
-                        </a:rPr>
-                        <a:t>199</a:t>
-                      </a:r>
-                    </a:p>
-                  </a:txBody>
-                  <a:tcPr>
-                    <a:solidFill>
-                      <a:srgbClr val="EAF1FF"/>
-                    </a:solidFill>
-                  </a:tcPr>
-                </a:tc>
-                <a:tc>
-                  <a:txBody>
-                    <a:bodyPr/>
-                    <a:lstStyle/>
-                    <a:p>
-                      <a:r>
-                        <a:rPr sz="1400">
-                          <a:solidFill>
-                            <a:srgbClr val="16213F"/>
-                          </a:solidFill>
-                        </a:rPr>
-                        <a:t>232</a:t>
-                      </a:r>
-                    </a:p>
-                  </a:txBody>
-                  <a:tcPr>
-                    <a:solidFill>
-                      <a:srgbClr val="EAF1FF"/>
-                    </a:solidFill>
-                  </a:tcPr>
-                </a:tc>
-              </a:tr>
-              <a:tr h="548640">
+              <a:tr h="487680">
                 <a:tc>
                   <a:txBody>
                     <a:bodyPr/>
@@ -6113,6 +7554,9 @@
   <p:clrMapOvr>
     <a:masterClrMapping/>
   </p:clrMapOvr>
+  <p:transition spd="med">
+    <p:fade/>
+  </p:transition>
 </p:sld>
 </file>
 
@@ -6179,6 +7623,68 @@
 </file>
 
 <file path=ppt/slides/slide7.xml><?xml version="1.0" encoding="utf-8"?>
+<p:sld xmlns:a="http://schemas.openxmlformats.org/drawingml/2006/main" xmlns:p="http://schemas.openxmlformats.org/presentationml/2006/main" xmlns:r="http://schemas.openxmlformats.org/officeDocument/2006/relationships">
+  <p:cSld>
+    <p:spTree>
+      <p:nvGrpSpPr>
+        <p:cNvPr id="1" name=""/>
+        <p:cNvGrpSpPr/>
+        <p:nvPr/>
+      </p:nvGrpSpPr>
+      <p:grpSpPr/>
+      <p:sp>
+        <p:nvSpPr>
+          <p:cNvPr id="2" name="Title 1"/>
+          <p:cNvSpPr>
+            <a:spLocks noGrp="1"/>
+          </p:cNvSpPr>
+          <p:nvPr>
+            <p:ph type="title"/>
+          </p:nvPr>
+        </p:nvSpPr>
+        <p:spPr/>
+        <p:txBody>
+          <a:bodyPr/>
+          <a:lstStyle/>
+          <a:p>
+            <a:r>
+              <a:rPr sz="2800" b="1">
+                <a:solidFill>
+                  <a:srgbClr val="16213F"/>
+                </a:solidFill>
+              </a:rPr>
+              <a:t>FY2026 Revenue Mix by Region</a:t>
+            </a:r>
+          </a:p>
+        </p:txBody>
+      </p:sp>
+      <p:graphicFrame>
+        <p:nvGraphicFramePr>
+          <p:cNvPr id="3" name="Chart 2"/>
+          <p:cNvGraphicFramePr>
+            <a:graphicFrameLocks noGrp="1"/>
+          </p:cNvGraphicFramePr>
+          <p:nvPr/>
+        </p:nvGraphicFramePr>
+        <p:xfrm>
+          <a:off x="1828800" y="1828800"/>
+          <a:ext cx="5486400" cy="4114800"/>
+        </p:xfrm>
+        <a:graphic>
+          <a:graphicData uri="http://schemas.openxmlformats.org/drawingml/2006/chart">
+            <c:chart xmlns:c="http://schemas.openxmlformats.org/drawingml/2006/chart" r:id="rId2"/>
+          </a:graphicData>
+        </a:graphic>
+      </p:graphicFrame>
+    </p:spTree>
+  </p:cSld>
+  <p:clrMapOvr>
+    <a:masterClrMapping/>
+  </p:clrMapOvr>
+</p:sld>
+</file>
+
+<file path=ppt/slides/slide8.xml><?xml version="1.0" encoding="utf-8"?>
 <p:sld xmlns:a="http://schemas.openxmlformats.org/drawingml/2006/main" xmlns:p="http://schemas.openxmlformats.org/presentationml/2006/main" xmlns:r="http://schemas.openxmlformats.org/officeDocument/2006/relationships">
   <p:cSld>
     <p:spTree>
@@ -6680,7 +8186,7 @@
 </p:sld>
 </file>
 
-<file path=ppt/slides/slide8.xml><?xml version="1.0" encoding="utf-8"?>
+<file path=ppt/slides/slide9.xml><?xml version="1.0" encoding="utf-8"?>
 <p:sld xmlns:a="http://schemas.openxmlformats.org/drawingml/2006/main" xmlns:p="http://schemas.openxmlformats.org/presentationml/2006/main" xmlns:r="http://schemas.openxmlformats.org/officeDocument/2006/relationships">
   <p:cSld>
     <p:spTree>
@@ -6782,6 +8288,23 @@
                 </a:solidFill>
               </a:rPr>
               <a:t>The logo is simply the BrandDocs name, with no icon or badge.</a:t>
+            </a:r>
+          </a:p>
+          <a:p>
+            <a:pPr/>
+            <a:r>
+              <a:rPr sz="1600">
+                <a:solidFill>
+                  <a:srgbClr val="16213F"/>
+                </a:solidFill>
+              </a:rPr>
+              <a:t>Brand guidelines:</a:t>
+            </a:r>
+            <a:r>
+              <a:rPr sz="1600">
+                <a:hlinkClick r:id="rId3"/>
+              </a:rPr>
+              <a:t> example.com/brand</a:t>
             </a:r>
           </a:p>
         </p:txBody>
@@ -6815,384 +8338,9 @@
   <p:clrMapOvr>
     <a:masterClrMapping/>
   </p:clrMapOvr>
-</p:sld>
-</file>
-
-<file path=ppt/slides/slide9.xml><?xml version="1.0" encoding="utf-8"?>
-<p:sld xmlns:a="http://schemas.openxmlformats.org/drawingml/2006/main" xmlns:p="http://schemas.openxmlformats.org/presentationml/2006/main" xmlns:r="http://schemas.openxmlformats.org/officeDocument/2006/relationships">
-  <p:cSld>
-    <p:spTree>
-      <p:nvGrpSpPr>
-        <p:cNvPr id="1" name=""/>
-        <p:cNvGrpSpPr/>
-        <p:nvPr/>
-      </p:nvGrpSpPr>
-      <p:grpSpPr/>
-      <p:sp>
-        <p:nvSpPr>
-          <p:cNvPr id="2" name="Title 1"/>
-          <p:cNvSpPr>
-            <a:spLocks noGrp="1"/>
-          </p:cNvSpPr>
-          <p:nvPr>
-            <p:ph type="title"/>
-          </p:nvPr>
-        </p:nvSpPr>
-        <p:spPr/>
-        <p:txBody>
-          <a:bodyPr/>
-          <a:lstStyle/>
-          <a:p>
-            <a:r>
-              <a:rPr sz="2800" b="1">
-                <a:solidFill>
-                  <a:srgbClr val="16213F"/>
-                </a:solidFill>
-              </a:rPr>
-              <a:t>Our Approach (SmartArt-style process)</a:t>
-            </a:r>
-          </a:p>
-        </p:txBody>
-      </p:sp>
-      <p:sp>
-        <p:nvSpPr>
-          <p:cNvPr id="3" name="Rounded Rectangle 2"/>
-          <p:cNvSpPr/>
-          <p:nvPr/>
-        </p:nvSpPr>
-        <p:spPr>
-          <a:xfrm>
-            <a:off x="685800" y="2743200"/>
-            <a:ext cx="2286000" cy="1143000"/>
-          </a:xfrm>
-          <a:prstGeom prst="roundRect">
-            <a:avLst/>
-          </a:prstGeom>
-          <a:solidFill>
-            <a:srgbClr val="16213F"/>
-          </a:solidFill>
-          <a:ln w="19050">
-            <a:solidFill>
-              <a:srgbClr val="5778B0"/>
-            </a:solidFill>
-          </a:ln>
-          <a:effectLst/>
-        </p:spPr>
-        <p:style>
-          <a:lnRef idx="1">
-            <a:schemeClr val="accent1"/>
-          </a:lnRef>
-          <a:fillRef idx="3">
-            <a:schemeClr val="accent1"/>
-          </a:fillRef>
-          <a:effectRef idx="2">
-            <a:schemeClr val="accent1"/>
-          </a:effectRef>
-          <a:fontRef idx="minor">
-            <a:schemeClr val="lt1"/>
-          </a:fontRef>
-        </p:style>
-        <p:txBody>
-          <a:bodyPr rtlCol="0" anchor="ctr" wrap="square"/>
-          <a:lstStyle/>
-          <a:p>
-            <a:pPr algn="ctr"/>
-            <a:r>
-              <a:rPr sz="2000" b="1">
-                <a:solidFill>
-                  <a:srgbClr val="FFFFFF"/>
-                </a:solidFill>
-              </a:rPr>
-              <a:t>Discover</a:t>
-            </a:r>
-          </a:p>
-        </p:txBody>
-      </p:sp>
-      <p:sp>
-        <p:nvSpPr>
-          <p:cNvPr id="4" name="TextBox 3"/>
-          <p:cNvSpPr txBox="1"/>
-          <p:nvPr/>
-        </p:nvSpPr>
-        <p:spPr>
-          <a:xfrm>
-            <a:off x="685800" y="3977640"/>
-            <a:ext cx="2286000" cy="457200"/>
-          </a:xfrm>
-          <a:prstGeom prst="rect">
-            <a:avLst/>
-          </a:prstGeom>
-          <a:noFill/>
-        </p:spPr>
-        <p:txBody>
-          <a:bodyPr wrap="square">
-            <a:spAutoFit/>
-          </a:bodyPr>
-          <a:lstStyle/>
-          <a:p>
-            <a:pPr algn="ctr"/>
-            <a:r>
-              <a:rPr sz="1200">
-                <a:solidFill>
-                  <a:srgbClr val="5778B0"/>
-                </a:solidFill>
-              </a:rPr>
-              <a:t>Validate the opportunity</a:t>
-            </a:r>
-          </a:p>
-        </p:txBody>
-      </p:sp>
-      <p:sp>
-        <p:nvSpPr>
-          <p:cNvPr id="5" name="Rounded Rectangle 4"/>
-          <p:cNvSpPr/>
-          <p:nvPr/>
-        </p:nvSpPr>
-        <p:spPr>
-          <a:xfrm>
-            <a:off x="3429000" y="2743200"/>
-            <a:ext cx="2286000" cy="1143000"/>
-          </a:xfrm>
-          <a:prstGeom prst="roundRect">
-            <a:avLst/>
-          </a:prstGeom>
-          <a:solidFill>
-            <a:srgbClr val="2B7CD3"/>
-          </a:solidFill>
-          <a:ln w="19050">
-            <a:solidFill>
-              <a:srgbClr val="5778B0"/>
-            </a:solidFill>
-          </a:ln>
-          <a:effectLst/>
-        </p:spPr>
-        <p:style>
-          <a:lnRef idx="1">
-            <a:schemeClr val="accent1"/>
-          </a:lnRef>
-          <a:fillRef idx="3">
-            <a:schemeClr val="accent1"/>
-          </a:fillRef>
-          <a:effectRef idx="2">
-            <a:schemeClr val="accent1"/>
-          </a:effectRef>
-          <a:fontRef idx="minor">
-            <a:schemeClr val="lt1"/>
-          </a:fontRef>
-        </p:style>
-        <p:txBody>
-          <a:bodyPr rtlCol="0" anchor="ctr" wrap="square"/>
-          <a:lstStyle/>
-          <a:p>
-            <a:pPr algn="ctr"/>
-            <a:r>
-              <a:rPr sz="2000" b="1">
-                <a:solidFill>
-                  <a:srgbClr val="FFFFFF"/>
-                </a:solidFill>
-              </a:rPr>
-              <a:t>Build</a:t>
-            </a:r>
-          </a:p>
-        </p:txBody>
-      </p:sp>
-      <p:cxnSp>
-        <p:nvCxnSpPr>
-          <p:cNvPr id="6" name="Connector 5"/>
-          <p:cNvCxnSpPr/>
-          <p:nvPr/>
-        </p:nvCxnSpPr>
-        <p:spPr>
-          <a:xfrm>
-            <a:off x="2971800" y="3314700"/>
-            <a:ext cx="457200" cy="0"/>
-          </a:xfrm>
-          <a:prstGeom prst="line">
-            <a:avLst/>
-          </a:prstGeom>
-          <a:ln w="31750">
-            <a:solidFill>
-              <a:srgbClr val="5778B0"/>
-            </a:solidFill>
-          </a:ln>
-        </p:spPr>
-        <p:style>
-          <a:lnRef idx="2">
-            <a:schemeClr val="accent1"/>
-          </a:lnRef>
-          <a:fillRef idx="0">
-            <a:schemeClr val="accent1"/>
-          </a:fillRef>
-          <a:effectRef idx="1">
-            <a:schemeClr val="accent1"/>
-          </a:effectRef>
-          <a:fontRef idx="minor">
-            <a:schemeClr val="tx1"/>
-          </a:fontRef>
-        </p:style>
-      </p:cxnSp>
-      <p:sp>
-        <p:nvSpPr>
-          <p:cNvPr id="7" name="TextBox 6"/>
-          <p:cNvSpPr txBox="1"/>
-          <p:nvPr/>
-        </p:nvSpPr>
-        <p:spPr>
-          <a:xfrm>
-            <a:off x="3429000" y="3977640"/>
-            <a:ext cx="2286000" cy="457200"/>
-          </a:xfrm>
-          <a:prstGeom prst="rect">
-            <a:avLst/>
-          </a:prstGeom>
-          <a:noFill/>
-        </p:spPr>
-        <p:txBody>
-          <a:bodyPr wrap="square">
-            <a:spAutoFit/>
-          </a:bodyPr>
-          <a:lstStyle/>
-          <a:p>
-            <a:pPr algn="ctr"/>
-            <a:r>
-              <a:rPr sz="1200">
-                <a:solidFill>
-                  <a:srgbClr val="5778B0"/>
-                </a:solidFill>
-              </a:rPr>
-              <a:t>Ship the MVP</a:t>
-            </a:r>
-          </a:p>
-        </p:txBody>
-      </p:sp>
-      <p:sp>
-        <p:nvSpPr>
-          <p:cNvPr id="8" name="Rounded Rectangle 7"/>
-          <p:cNvSpPr/>
-          <p:nvPr/>
-        </p:nvSpPr>
-        <p:spPr>
-          <a:xfrm>
-            <a:off x="6172200" y="2743200"/>
-            <a:ext cx="2286000" cy="1143000"/>
-          </a:xfrm>
-          <a:prstGeom prst="roundRect">
-            <a:avLst/>
-          </a:prstGeom>
-          <a:solidFill>
-            <a:srgbClr val="E0742B"/>
-          </a:solidFill>
-          <a:ln w="19050">
-            <a:solidFill>
-              <a:srgbClr val="5778B0"/>
-            </a:solidFill>
-          </a:ln>
-          <a:effectLst/>
-        </p:spPr>
-        <p:style>
-          <a:lnRef idx="1">
-            <a:schemeClr val="accent1"/>
-          </a:lnRef>
-          <a:fillRef idx="3">
-            <a:schemeClr val="accent1"/>
-          </a:fillRef>
-          <a:effectRef idx="2">
-            <a:schemeClr val="accent1"/>
-          </a:effectRef>
-          <a:fontRef idx="minor">
-            <a:schemeClr val="lt1"/>
-          </a:fontRef>
-        </p:style>
-        <p:txBody>
-          <a:bodyPr rtlCol="0" anchor="ctr" wrap="square"/>
-          <a:lstStyle/>
-          <a:p>
-            <a:pPr algn="ctr"/>
-            <a:r>
-              <a:rPr sz="2000" b="1">
-                <a:solidFill>
-                  <a:srgbClr val="FFFFFF"/>
-                </a:solidFill>
-              </a:rPr>
-              <a:t>Scale</a:t>
-            </a:r>
-          </a:p>
-        </p:txBody>
-      </p:sp>
-      <p:cxnSp>
-        <p:nvCxnSpPr>
-          <p:cNvPr id="9" name="Connector 8"/>
-          <p:cNvCxnSpPr/>
-          <p:nvPr/>
-        </p:nvCxnSpPr>
-        <p:spPr>
-          <a:xfrm>
-            <a:off x="5715000" y="3314700"/>
-            <a:ext cx="457200" cy="0"/>
-          </a:xfrm>
-          <a:prstGeom prst="line">
-            <a:avLst/>
-          </a:prstGeom>
-          <a:ln w="31750">
-            <a:solidFill>
-              <a:srgbClr val="5778B0"/>
-            </a:solidFill>
-          </a:ln>
-        </p:spPr>
-        <p:style>
-          <a:lnRef idx="2">
-            <a:schemeClr val="accent1"/>
-          </a:lnRef>
-          <a:fillRef idx="0">
-            <a:schemeClr val="accent1"/>
-          </a:fillRef>
-          <a:effectRef idx="1">
-            <a:schemeClr val="accent1"/>
-          </a:effectRef>
-          <a:fontRef idx="minor">
-            <a:schemeClr val="tx1"/>
-          </a:fontRef>
-        </p:style>
-      </p:cxnSp>
-      <p:sp>
-        <p:nvSpPr>
-          <p:cNvPr id="10" name="TextBox 9"/>
-          <p:cNvSpPr txBox="1"/>
-          <p:nvPr/>
-        </p:nvSpPr>
-        <p:spPr>
-          <a:xfrm>
-            <a:off x="6172200" y="3977640"/>
-            <a:ext cx="2286000" cy="457200"/>
-          </a:xfrm>
-          <a:prstGeom prst="rect">
-            <a:avLst/>
-          </a:prstGeom>
-          <a:noFill/>
-        </p:spPr>
-        <p:txBody>
-          <a:bodyPr wrap="square">
-            <a:spAutoFit/>
-          </a:bodyPr>
-          <a:lstStyle/>
-          <a:p>
-            <a:pPr algn="ctr"/>
-            <a:r>
-              <a:rPr sz="1200">
-                <a:solidFill>
-                  <a:srgbClr val="5778B0"/>
-                </a:solidFill>
-              </a:rPr>
-              <a:t>Grow to new regions</a:t>
-            </a:r>
-          </a:p>
-        </p:txBody>
-      </p:sp>
-    </p:spTree>
-  </p:cSld>
-  <p:clrMapOvr>
-    <a:masterClrMapping/>
-  </p:clrMapOvr>
+  <p:transition spd="med">
+    <p:fade/>
+  </p:transition>
 </p:sld>
 </file>
 
@@ -7201,45 +8349,45 @@
   <a:themeElements>
     <a:clrScheme name="Office">
       <a:dk1>
-        <a:sysClr val="windowText" lastClr="000000"/>
+        <a:srgbClr val="16213F"/>
       </a:dk1>
       <a:lt1>
-        <a:sysClr val="window" lastClr="FFFFFF"/>
+        <a:srgbClr val="FFFFFF"/>
       </a:lt1>
       <a:dk2>
-        <a:srgbClr val="1F497D"/>
+        <a:srgbClr val="2B7CD3"/>
       </a:dk2>
       <a:lt2>
-        <a:srgbClr val="EEECE1"/>
+        <a:srgbClr val="EAF1FF"/>
       </a:lt2>
       <a:accent1>
-        <a:srgbClr val="4F81BD"/>
+        <a:srgbClr val="2B7CD3"/>
       </a:accent1>
       <a:accent2>
-        <a:srgbClr val="C0504D"/>
+        <a:srgbClr val="E0742B"/>
       </a:accent2>
       <a:accent3>
-        <a:srgbClr val="9BBB59"/>
+        <a:srgbClr val="DCE7FF"/>
       </a:accent3>
       <a:accent4>
-        <a:srgbClr val="8064A2"/>
+        <a:srgbClr val="5778B0"/>
       </a:accent4>
       <a:accent5>
-        <a:srgbClr val="4BACC6"/>
+        <a:srgbClr val="1F3A6B"/>
       </a:accent5>
       <a:accent6>
-        <a:srgbClr val="F79646"/>
+        <a:srgbClr val="8FA9D8"/>
       </a:accent6>
       <a:hlink>
-        <a:srgbClr val="0000FF"/>
+        <a:srgbClr val="2B7CD3"/>
       </a:hlink>
       <a:folHlink>
-        <a:srgbClr val="800080"/>
+        <a:srgbClr val="16213F"/>
       </a:folHlink>
     </a:clrScheme>
     <a:fontScheme name="Office">
       <a:majorFont>
-        <a:latin typeface="Calibri"/>
+        <a:latin typeface="Arial"/>
         <a:ea typeface=""/>
         <a:cs typeface=""/>
         <a:font script="Jpan" typeface="ＭＳ Ｐゴシック"/>

--- a/examples/templates/branddocs_template.pptx
+++ b/examples/templates/branddocs_template.pptx
@@ -4,6 +4,9 @@
   <p:sldMasterIdLst>
     <p:sldMasterId id="2147483648" r:id="rId1"/>
   </p:sldMasterIdLst>
+  <p:notesMasterIdLst>
+    <p:notesMasterId r:id="rId9"/>
+  </p:notesMasterIdLst>
   <p:sldIdLst>
     <p:sldId id="256" r:id="rId7"/>
     <p:sldId id="257" r:id="rId8"/>

--- a/examples/templates/branddocs_template.pptx
+++ b/examples/templates/branddocs_template.pptx
@@ -8355,7 +8355,7 @@
         <a:srgbClr val="16213F"/>
       </a:dk1>
       <a:lt1>
-        <a:srgbClr val="FFFFFF"/>
+        <a:srgbClr val="EAF1FF"/>
       </a:lt1>
       <a:dk2>
         <a:srgbClr val="2B7CD3"/>
@@ -8373,19 +8373,19 @@
         <a:srgbClr val="DCE7FF"/>
       </a:accent3>
       <a:accent4>
-        <a:srgbClr val="5778B0"/>
+        <a:srgbClr val="E0742B"/>
       </a:accent4>
       <a:accent5>
-        <a:srgbClr val="1F3A6B"/>
+        <a:srgbClr val="2B7CD3"/>
       </a:accent5>
       <a:accent6>
-        <a:srgbClr val="8FA9D8"/>
+        <a:srgbClr val="E0742B"/>
       </a:accent6>
       <a:hlink>
         <a:srgbClr val="2B7CD3"/>
       </a:hlink>
       <a:folHlink>
-        <a:srgbClr val="16213F"/>
+        <a:srgbClr val="E0742B"/>
       </a:folHlink>
     </a:clrScheme>
     <a:fontScheme name="Office">
